--- a/guidelines/CMF-plantilla-2026.pptx
+++ b/guidelines/CMF-plantilla-2026.pptx
@@ -752,6 +752,1744 @@
 </p:sldLayout>
 </file>
 
+<file path=ppt/slideLayouts/slideLayout2.xml><?xml version="1.0" encoding="utf-8"?>
+<p:sldLayout xmlns:p="http://schemas.openxmlformats.org/presentationml/2006/main" xmlns:a="http://schemas.openxmlformats.org/drawingml/2006/main" xmlns:r="http://schemas.openxmlformats.org/officeDocument/2006/relationships" preserve="1" type="title">
+  <p:cSld name="CMF Portada">
+    <p:bg>
+      <p:bgPr>
+        <a:solidFill>
+          <a:srgbClr val="FFFFFF"/>
+        </a:solidFill>
+      </p:bgPr>
+    </p:bg>
+    <p:spTree>
+      <p:nvGrpSpPr>
+        <p:cNvPr id="1" name=""/>
+        <p:cNvGrpSpPr/>
+        <p:nvPr/>
+      </p:nvGrpSpPr>
+      <p:grpSpPr>
+        <a:xfrm>
+          <a:off x="0" y="0"/>
+          <a:ext cx="0" cy="0"/>
+          <a:chOff x="0" y="0"/>
+          <a:chExt cx="0" cy="0"/>
+        </a:xfrm>
+      </p:grpSpPr>
+      <p:sp>
+        <p:nvSpPr>
+          <p:cNvPr id="2" name="Shape 0"/>
+          <p:cNvSpPr/>
+          <p:nvPr/>
+        </p:nvSpPr>
+        <p:spPr>
+          <a:xfrm>
+            <a:off x="0" y="0"/>
+            <a:ext cx="18288000" cy="5600700"/>
+          </a:xfrm>
+          <a:prstGeom prst="rect">
+            <a:avLst/>
+          </a:prstGeom>
+          <a:solidFill>
+            <a:srgbClr val="162D56"/>
+          </a:solidFill>
+          <a:ln/>
+        </p:spPr>
+      </p:sp>
+      <p:pic>
+        <p:nvPicPr>
+          <p:cNvPr id="3" name="Image 0" descr="preencoded.png">    </p:cNvPr>
+          <p:cNvPicPr>
+            <a:picLocks noChangeAspect="1"/>
+          </p:cNvPicPr>
+          <p:nvPr/>
+        </p:nvPicPr>
+        <p:blipFill>
+          <a:blip r:embed="rId1"/>
+          <a:srcRect l="0" r="0" t="3330" b="3330"/>
+          <a:stretch/>
+        </p:blipFill>
+        <p:spPr>
+          <a:xfrm>
+            <a:off x="0" y="0"/>
+            <a:ext cx="18288000" cy="5600700"/>
+          </a:xfrm>
+          <a:prstGeom prst="rect">
+            <a:avLst/>
+          </a:prstGeom>
+        </p:spPr>
+      </p:pic>
+      <p:sp>
+        <p:nvSpPr>
+          <p:cNvPr id="4" name="Text 1"/>
+          <p:cNvSpPr/>
+          <p:nvPr>
+            <p:ph type="ctrTitle"/>
+          </p:nvPr>
+        </p:nvSpPr>
+        <p:spPr>
+          <a:xfrm>
+            <a:off x="1828800" y="5971032"/>
+            <a:ext cx="14630400" cy="1280160"/>
+          </a:xfrm>
+          <a:prstGeom prst="rect">
+            <a:avLst/>
+          </a:prstGeom>
+          <a:noFill/>
+          <a:ln/>
+        </p:spPr>
+        <p:txBody>
+          <a:bodyPr wrap="square" lIns="25400" tIns="25400" rIns="25400" bIns="25400" rtlCol="0" anchor="t">
+            <a:normAutofit/>
+          </a:bodyPr>
+          <a:lstStyle>
+            <a:lvl1pPr algn="ctr" indent="0" marL="0">
+              <a:lnSpc>
+                <a:spcPct val="98630"/>
+              </a:lnSpc>
+              <a:buNone/>
+              <a:defRPr sz="4500" b="1">
+                <a:solidFill>
+                  <a:srgbClr val="575756"/>
+                </a:solidFill>
+                <a:latin typeface="Verdana" pitchFamily="34" charset="0"/>
+                <a:ea typeface="Verdana" pitchFamily="34" charset="-122"/>
+                <a:cs typeface="Verdana" pitchFamily="34" charset="-120"/>
+              </a:defRPr>
+            </a:lvl1pPr>
+          </a:lstStyle>
+          <a:p>
+            <a:pPr algn="ctr" indent="0" marL="0">
+              <a:lnSpc>
+                <a:spcPct val="98630"/>
+              </a:lnSpc>
+              <a:buNone/>
+            </a:pPr>
+            <a:r>
+              <a:rPr lang="en-US" sz="4500" b="1" spc="-45" kern="0" dirty="0">
+                <a:solidFill>
+                  <a:srgbClr val="575756"/>
+                </a:solidFill>
+                <a:latin typeface="Verdana" pitchFamily="34" charset="0"/>
+                <a:ea typeface="Verdana" pitchFamily="34" charset="-122"/>
+                <a:cs typeface="Verdana" pitchFamily="34" charset="-120"/>
+              </a:rPr>
+              <a:t>Título de la presentación</a:t>
+            </a:r>
+            <a:endParaRPr lang="en-US" sz="4500" dirty="0"/>
+          </a:p>
+        </p:txBody>
+      </p:sp>
+      <p:sp>
+        <p:nvSpPr>
+          <p:cNvPr id="5" name="Text 2"/>
+          <p:cNvSpPr/>
+          <p:nvPr>
+            <p:ph type="subTitle" idx="1"/>
+          </p:nvPr>
+        </p:nvSpPr>
+        <p:spPr>
+          <a:xfrm>
+            <a:off x="1828800" y="7424928"/>
+            <a:ext cx="14630400" cy="512064"/>
+          </a:xfrm>
+          <a:prstGeom prst="rect">
+            <a:avLst/>
+          </a:prstGeom>
+          <a:noFill/>
+          <a:ln/>
+        </p:spPr>
+        <p:txBody>
+          <a:bodyPr wrap="square" lIns="25400" tIns="25400" rIns="25400" bIns="25400" rtlCol="0" anchor="t">
+            <a:normAutofit/>
+          </a:bodyPr>
+          <a:lstStyle>
+            <a:lvl1pPr algn="ctr" indent="0" marL="0">
+              <a:lnSpc>
+                <a:spcPct val="123750"/>
+              </a:lnSpc>
+              <a:buNone/>
+              <a:defRPr sz="2475" b="1">
+                <a:solidFill>
+                  <a:srgbClr val="2C2C2B"/>
+                </a:solidFill>
+                <a:latin typeface="Verdana" pitchFamily="34" charset="0"/>
+                <a:ea typeface="Verdana" pitchFamily="34" charset="-122"/>
+                <a:cs typeface="Verdana" pitchFamily="34" charset="-120"/>
+              </a:defRPr>
+            </a:lvl1pPr>
+          </a:lstStyle>
+          <a:p>
+            <a:pPr algn="ctr" indent="0" marL="0">
+              <a:lnSpc>
+                <a:spcPct val="123750"/>
+              </a:lnSpc>
+              <a:buNone/>
+            </a:pPr>
+            <a:r>
+              <a:rPr lang="en-US" sz="2475" b="1" dirty="0">
+                <a:solidFill>
+                  <a:srgbClr val="2C2C2B"/>
+                </a:solidFill>
+                <a:latin typeface="Verdana" pitchFamily="34" charset="0"/>
+                <a:ea typeface="Verdana" pitchFamily="34" charset="-122"/>
+                <a:cs typeface="Verdana" pitchFamily="34" charset="-120"/>
+              </a:rPr>
+              <a:t>Nombre Apellido</a:t>
+            </a:r>
+            <a:endParaRPr lang="en-US" sz="2475" dirty="0"/>
+          </a:p>
+        </p:txBody>
+      </p:sp>
+      <p:sp>
+        <p:nvSpPr>
+          <p:cNvPr id="6" name="Text 3"/>
+          <p:cNvSpPr/>
+          <p:nvPr>
+            <p:ph type="body" idx="2"/>
+          </p:nvPr>
+        </p:nvSpPr>
+        <p:spPr>
+          <a:xfrm>
+            <a:off x="1828800" y="7955280"/>
+            <a:ext cx="14630400" cy="621792"/>
+          </a:xfrm>
+          <a:prstGeom prst="rect">
+            <a:avLst/>
+          </a:prstGeom>
+          <a:noFill/>
+          <a:ln/>
+        </p:spPr>
+        <p:txBody>
+          <a:bodyPr wrap="square" lIns="25400" tIns="25400" rIns="25400" bIns="25400" rtlCol="0" anchor="t">
+            <a:normAutofit/>
+          </a:bodyPr>
+          <a:lstStyle>
+            <a:lvl1pPr algn="ctr" indent="0" marL="0">
+              <a:lnSpc>
+                <a:spcPct val="121800"/>
+              </a:lnSpc>
+              <a:buNone/>
+              <a:defRPr sz="1575">
+                <a:solidFill>
+                  <a:srgbClr val="575756"/>
+                </a:solidFill>
+                <a:latin typeface="Verdana" pitchFamily="34" charset="0"/>
+                <a:ea typeface="Verdana" pitchFamily="34" charset="-122"/>
+                <a:cs typeface="Verdana" pitchFamily="34" charset="-120"/>
+              </a:defRPr>
+            </a:lvl1pPr>
+          </a:lstStyle>
+          <a:p>
+            <a:pPr algn="ctr" indent="0" marL="0">
+              <a:lnSpc>
+                <a:spcPct val="121800"/>
+              </a:lnSpc>
+              <a:buNone/>
+            </a:pPr>
+            <a:r>
+              <a:rPr lang="en-US" sz="1575" dirty="0">
+                <a:solidFill>
+                  <a:srgbClr val="575756"/>
+                </a:solidFill>
+                <a:latin typeface="Verdana" pitchFamily="34" charset="0"/>
+                <a:ea typeface="Verdana" pitchFamily="34" charset="-122"/>
+                <a:cs typeface="Verdana" pitchFamily="34" charset="-120"/>
+              </a:rPr>
+              <a:t>Cargo / Dirección Comisión para el Mercado Financiero</a:t>
+            </a:r>
+            <a:endParaRPr lang="en-US" sz="1575" dirty="0"/>
+          </a:p>
+        </p:txBody>
+      </p:sp>
+      <p:sp>
+        <p:nvSpPr>
+          <p:cNvPr id="7" name="Text 4"/>
+          <p:cNvSpPr/>
+          <p:nvPr>
+            <p:ph type="body" idx="3"/>
+          </p:nvPr>
+        </p:nvSpPr>
+        <p:spPr>
+          <a:xfrm>
+            <a:off x="1828800" y="8933688"/>
+            <a:ext cx="14630400" cy="365760"/>
+          </a:xfrm>
+          <a:prstGeom prst="rect">
+            <a:avLst/>
+          </a:prstGeom>
+          <a:noFill/>
+          <a:ln/>
+        </p:spPr>
+        <p:txBody>
+          <a:bodyPr wrap="square" lIns="25400" tIns="25400" rIns="25400" bIns="25400" rtlCol="0" anchor="t">
+            <a:normAutofit/>
+          </a:bodyPr>
+          <a:lstStyle>
+            <a:lvl1pPr algn="ctr" indent="0" marL="0">
+              <a:lnSpc>
+                <a:spcPct val="123214"/>
+              </a:lnSpc>
+              <a:buNone/>
+              <a:defRPr sz="1725" b="1">
+                <a:solidFill>
+                  <a:srgbClr val="575756"/>
+                </a:solidFill>
+                <a:latin typeface="Verdana" pitchFamily="34" charset="0"/>
+                <a:ea typeface="Verdana" pitchFamily="34" charset="-122"/>
+                <a:cs typeface="Verdana" pitchFamily="34" charset="-120"/>
+              </a:defRPr>
+            </a:lvl1pPr>
+          </a:lstStyle>
+          <a:p>
+            <a:pPr algn="ctr" indent="0" marL="0">
+              <a:lnSpc>
+                <a:spcPct val="123214"/>
+              </a:lnSpc>
+              <a:buNone/>
+            </a:pPr>
+            <a:r>
+              <a:rPr lang="en-US" sz="1725" b="1" dirty="0">
+                <a:solidFill>
+                  <a:srgbClr val="575756"/>
+                </a:solidFill>
+                <a:latin typeface="Verdana" pitchFamily="34" charset="0"/>
+                <a:ea typeface="Verdana" pitchFamily="34" charset="-122"/>
+                <a:cs typeface="Verdana" pitchFamily="34" charset="-120"/>
+              </a:rPr>
+              <a:t>Marzo 2026</a:t>
+            </a:r>
+            <a:endParaRPr lang="en-US" sz="1725" dirty="0"/>
+          </a:p>
+        </p:txBody>
+      </p:sp>
+      <p:sp>
+        <p:nvSpPr>
+          <p:cNvPr id="8" name="Shape 5"/>
+          <p:cNvSpPr/>
+          <p:nvPr/>
+        </p:nvSpPr>
+        <p:spPr>
+          <a:xfrm>
+            <a:off x="0" y="9629775"/>
+            <a:ext cx="18288000" cy="657225"/>
+          </a:xfrm>
+          <a:prstGeom prst="rect">
+            <a:avLst/>
+          </a:prstGeom>
+          <a:solidFill>
+            <a:srgbClr val="112351"/>
+          </a:solidFill>
+          <a:ln/>
+        </p:spPr>
+      </p:sp>
+      <p:pic>
+        <p:nvPicPr>
+          <p:cNvPr id="9" name="Image 1" descr="preencoded.png">    </p:cNvPr>
+          <p:cNvPicPr>
+            <a:picLocks noChangeAspect="1"/>
+          </p:cNvPicPr>
+          <p:nvPr/>
+        </p:nvPicPr>
+        <p:blipFill>
+          <a:blip r:embed="rId2"/>
+          <a:srcRect l="0" r="0" t="11564" b="11564"/>
+          <a:stretch/>
+        </p:blipFill>
+        <p:spPr>
+          <a:xfrm>
+            <a:off x="0" y="9629775"/>
+            <a:ext cx="18288000" cy="657225"/>
+          </a:xfrm>
+          <a:prstGeom prst="rect">
+            <a:avLst/>
+          </a:prstGeom>
+        </p:spPr>
+      </p:pic>
+      <p:sp>
+        <p:nvSpPr>
+          <p:cNvPr id="10" name="Text 6"/>
+          <p:cNvSpPr/>
+          <p:nvPr>
+            <p:ph type="sldNum" idx="10"/>
+          </p:nvPr>
+        </p:nvSpPr>
+        <p:spPr>
+          <a:xfrm>
+            <a:off x="16002000" y="9848088"/>
+            <a:ext cx="1371600" cy="265176"/>
+          </a:xfrm>
+          <a:prstGeom prst="rect">
+            <a:avLst/>
+          </a:prstGeom>
+          <a:noFill/>
+          <a:ln/>
+        </p:spPr>
+        <p:txBody>
+          <a:bodyPr wrap="square" lIns="25400" tIns="25400" rIns="25400" bIns="25400" rtlCol="0" anchor="t">
+            <a:normAutofit/>
+          </a:bodyPr>
+          <a:lstStyle>
+            <a:lvl1pPr algn="r" indent="0" marL="0">
+              <a:lnSpc>
+                <a:spcPct val="109091"/>
+              </a:lnSpc>
+              <a:buNone/>
+              <a:defRPr sz="1200">
+                <a:solidFill>
+                  <a:srgbClr val="FFFFFF">
+                    <a:alpha val="85000"/>
+                  </a:srgbClr>
+                </a:solidFill>
+                <a:latin typeface="Source Sans 3" pitchFamily="34" charset="0"/>
+                <a:ea typeface="Source Sans 3" pitchFamily="34" charset="-122"/>
+                <a:cs typeface="Source Sans 3" pitchFamily="34" charset="-120"/>
+              </a:defRPr>
+            </a:lvl1pPr>
+          </a:lstStyle>
+          <a:p>
+            <a:pPr algn="r" indent="0" marL="0">
+              <a:lnSpc>
+                <a:spcPct val="109091"/>
+              </a:lnSpc>
+              <a:buNone/>
+            </a:pPr>
+            <a:fld id="{B5E4E44B-B729-4933-9576-2397FE414F70}" type="slidenum">
+              <a:rPr lang="en-US" sz="1200" dirty="0">
+                <a:solidFill>
+                  <a:srgbClr val="FFFFFF">
+                    <a:alpha val="85000"/>
+                  </a:srgbClr>
+                </a:solidFill>
+                <a:latin typeface="Source Sans 3" pitchFamily="34" charset="0"/>
+                <a:ea typeface="Source Sans 3" pitchFamily="34" charset="-122"/>
+                <a:cs typeface="Source Sans 3" pitchFamily="34" charset="-120"/>
+              </a:rPr>
+              <a:t>1</a:t>
+            </a:fld>
+            <a:endParaRPr lang="en-US" sz="1200" dirty="0"/>
+          </a:p>
+        </p:txBody>
+      </p:sp>
+    </p:spTree>
+  </p:cSld>
+  <p:clrMapOvr>
+    <a:masterClrMapping/>
+  </p:clrMapOvr>
+</p:sldLayout>
+</file>
+
+<file path=ppt/slideLayouts/slideLayout3.xml><?xml version="1.0" encoding="utf-8"?>
+<p:sldLayout xmlns:p="http://schemas.openxmlformats.org/presentationml/2006/main" xmlns:a="http://schemas.openxmlformats.org/drawingml/2006/main" xmlns:r="http://schemas.openxmlformats.org/officeDocument/2006/relationships" preserve="1" type="secHead">
+  <p:cSld name="CMF Sección">
+    <p:bg>
+      <p:bgPr>
+        <a:solidFill>
+          <a:srgbClr val="FFFFFF"/>
+        </a:solidFill>
+      </p:bgPr>
+    </p:bg>
+    <p:spTree>
+      <p:nvGrpSpPr>
+        <p:cNvPr id="1" name=""/>
+        <p:cNvGrpSpPr/>
+        <p:nvPr/>
+      </p:nvGrpSpPr>
+      <p:grpSpPr>
+        <a:xfrm>
+          <a:off x="0" y="0"/>
+          <a:ext cx="0" cy="0"/>
+          <a:chOff x="0" y="0"/>
+          <a:chExt cx="0" cy="0"/>
+        </a:xfrm>
+      </p:grpSpPr>
+      <p:sp>
+        <p:nvSpPr>
+          <p:cNvPr id="2" name="Shape 0"/>
+          <p:cNvSpPr/>
+          <p:nvPr/>
+        </p:nvSpPr>
+        <p:spPr>
+          <a:xfrm>
+            <a:off x="0" y="0"/>
+            <a:ext cx="18288000" cy="114300"/>
+          </a:xfrm>
+          <a:prstGeom prst="rect">
+            <a:avLst/>
+          </a:prstGeom>
+          <a:solidFill>
+            <a:srgbClr val="5B2B82"/>
+          </a:solidFill>
+          <a:ln/>
+        </p:spPr>
+      </p:sp>
+      <p:sp>
+        <p:nvSpPr>
+          <p:cNvPr id="3" name="Text 1"/>
+          <p:cNvSpPr/>
+          <p:nvPr>
+            <p:ph type="body" idx="1"/>
+          </p:nvPr>
+        </p:nvSpPr>
+        <p:spPr>
+          <a:xfrm>
+            <a:off x="914400" y="640080"/>
+            <a:ext cx="16459200" cy="338328"/>
+          </a:xfrm>
+          <a:prstGeom prst="rect">
+            <a:avLst/>
+          </a:prstGeom>
+          <a:noFill/>
+          <a:ln/>
+        </p:spPr>
+        <p:txBody>
+          <a:bodyPr wrap="square" lIns="25400" tIns="25400" rIns="25400" bIns="25400" rtlCol="0" anchor="t">
+            <a:normAutofit/>
+          </a:bodyPr>
+          <a:lstStyle>
+            <a:lvl1pPr algn="l" indent="0" marL="0">
+              <a:lnSpc>
+                <a:spcPct val="105000"/>
+              </a:lnSpc>
+              <a:buNone/>
+              <a:defRPr sz="1575" b="1">
+                <a:solidFill>
+                  <a:srgbClr val="8547AD"/>
+                </a:solidFill>
+                <a:latin typeface="Source Sans 3" pitchFamily="34" charset="0"/>
+                <a:ea typeface="Source Sans 3" pitchFamily="34" charset="-122"/>
+                <a:cs typeface="Source Sans 3" pitchFamily="34" charset="-120"/>
+              </a:defRPr>
+            </a:lvl1pPr>
+          </a:lstStyle>
+          <a:p>
+            <a:pPr algn="l" indent="0" marL="0">
+              <a:lnSpc>
+                <a:spcPct val="105000"/>
+              </a:lnSpc>
+              <a:buNone/>
+            </a:pPr>
+            <a:r>
+              <a:rPr lang="en-US" sz="1575" b="1" spc="126" kern="0" dirty="0">
+                <a:solidFill>
+                  <a:srgbClr val="8547AD"/>
+                </a:solidFill>
+                <a:latin typeface="Source Sans 3" pitchFamily="34" charset="0"/>
+                <a:ea typeface="Source Sans 3" pitchFamily="34" charset="-122"/>
+                <a:cs typeface="Source Sans 3" pitchFamily="34" charset="-120"/>
+              </a:rPr>
+              <a:t>ANTETÍTULO DE SECCIÓN</a:t>
+            </a:r>
+            <a:endParaRPr lang="en-US" sz="1575" dirty="0"/>
+          </a:p>
+        </p:txBody>
+      </p:sp>
+      <p:pic>
+        <p:nvPicPr>
+          <p:cNvPr id="4" name="Image 0" descr="preencoded.png">    </p:cNvPr>
+          <p:cNvPicPr>
+            <a:picLocks noChangeAspect="1"/>
+          </p:cNvPicPr>
+          <p:nvPr/>
+        </p:nvPicPr>
+        <p:blipFill>
+          <a:blip r:embed="rId1"/>
+          <a:stretch>
+            <a:fillRect/>
+          </a:stretch>
+        </p:blipFill>
+        <p:spPr>
+          <a:xfrm>
+            <a:off x="15772656" y="542925"/>
+            <a:ext cx="1600944" cy="485775"/>
+          </a:xfrm>
+          <a:prstGeom prst="rect">
+            <a:avLst/>
+          </a:prstGeom>
+        </p:spPr>
+      </p:pic>
+      <p:sp>
+        <p:nvSpPr>
+          <p:cNvPr id="5" name="Text 2"/>
+          <p:cNvSpPr/>
+          <p:nvPr>
+            <p:ph type="title"/>
+          </p:nvPr>
+        </p:nvSpPr>
+        <p:spPr>
+          <a:xfrm>
+            <a:off x="914400" y="1197864"/>
+            <a:ext cx="16459200" cy="822960"/>
+          </a:xfrm>
+          <a:prstGeom prst="rect">
+            <a:avLst/>
+          </a:prstGeom>
+          <a:noFill/>
+          <a:ln/>
+        </p:spPr>
+        <p:txBody>
+          <a:bodyPr wrap="square" lIns="25400" tIns="25400" rIns="25400" bIns="25400" rtlCol="0" anchor="t">
+            <a:normAutofit/>
+          </a:bodyPr>
+          <a:lstStyle>
+            <a:lvl1pPr algn="l" indent="0" marL="0">
+              <a:lnSpc>
+                <a:spcPct val="95000"/>
+              </a:lnSpc>
+              <a:buNone/>
+              <a:defRPr sz="4275" b="1">
+                <a:solidFill>
+                  <a:srgbClr val="575756"/>
+                </a:solidFill>
+                <a:latin typeface="Verdana" pitchFamily="34" charset="0"/>
+                <a:ea typeface="Verdana" pitchFamily="34" charset="-122"/>
+                <a:cs typeface="Verdana" pitchFamily="34" charset="-120"/>
+              </a:defRPr>
+            </a:lvl1pPr>
+          </a:lstStyle>
+          <a:p>
+            <a:pPr algn="l" indent="0" marL="0">
+              <a:lnSpc>
+                <a:spcPct val="95000"/>
+              </a:lnSpc>
+              <a:buNone/>
+            </a:pPr>
+            <a:r>
+              <a:rPr lang="en-US" sz="4275" b="1" spc="-43" kern="0" dirty="0">
+                <a:solidFill>
+                  <a:srgbClr val="575756"/>
+                </a:solidFill>
+                <a:latin typeface="Verdana" pitchFamily="34" charset="0"/>
+                <a:ea typeface="Verdana" pitchFamily="34" charset="-122"/>
+                <a:cs typeface="Verdana" pitchFamily="34" charset="-120"/>
+              </a:rPr>
+              <a:t>Título de la diapositiva</a:t>
+            </a:r>
+            <a:endParaRPr lang="en-US" sz="4275" dirty="0"/>
+          </a:p>
+        </p:txBody>
+      </p:sp>
+      <p:sp>
+        <p:nvSpPr>
+          <p:cNvPr id="6" name="Shape 3"/>
+          <p:cNvSpPr/>
+          <p:nvPr/>
+        </p:nvSpPr>
+        <p:spPr>
+          <a:xfrm>
+            <a:off x="914400" y="2138809"/>
+            <a:ext cx="914400" cy="76200"/>
+          </a:xfrm>
+          <a:prstGeom prst="roundRect">
+            <a:avLst>
+              <a:gd name="adj" fmla="val 50000"/>
+            </a:avLst>
+          </a:prstGeom>
+          <a:solidFill>
+            <a:srgbClr val="5B2B82"/>
+          </a:solidFill>
+          <a:ln/>
+        </p:spPr>
+      </p:sp>
+      <p:sp>
+        <p:nvSpPr>
+          <p:cNvPr id="15" name="Shape 12"/>
+          <p:cNvSpPr/>
+          <p:nvPr/>
+        </p:nvSpPr>
+        <p:spPr>
+          <a:xfrm>
+            <a:off x="914400" y="9534525"/>
+            <a:ext cx="16459200" cy="9525"/>
+          </a:xfrm>
+          <a:prstGeom prst="rect">
+            <a:avLst/>
+          </a:prstGeom>
+          <a:solidFill>
+            <a:srgbClr val="D7D7D6"/>
+          </a:solidFill>
+          <a:ln/>
+        </p:spPr>
+      </p:sp>
+      <p:pic>
+        <p:nvPicPr>
+          <p:cNvPr id="16" name="Image 1" descr="preencoded.png">    </p:cNvPr>
+          <p:cNvPicPr>
+            <a:picLocks noChangeAspect="1"/>
+          </p:cNvPicPr>
+          <p:nvPr/>
+        </p:nvPicPr>
+        <p:blipFill>
+          <a:blip r:embed="rId2"/>
+          <a:stretch>
+            <a:fillRect/>
+          </a:stretch>
+        </p:blipFill>
+        <p:spPr>
+          <a:xfrm>
+            <a:off x="914400" y="9729788"/>
+            <a:ext cx="240804" cy="228600"/>
+          </a:xfrm>
+          <a:prstGeom prst="rect">
+            <a:avLst/>
+          </a:prstGeom>
+        </p:spPr>
+      </p:pic>
+      <p:sp>
+        <p:nvSpPr>
+          <p:cNvPr id="17" name="Text 13"/>
+          <p:cNvSpPr/>
+          <p:nvPr/>
+        </p:nvSpPr>
+        <p:spPr>
+          <a:xfrm>
+            <a:off x="1289304" y="9729216"/>
+            <a:ext cx="7315200" cy="274320"/>
+          </a:xfrm>
+          <a:prstGeom prst="rect">
+            <a:avLst/>
+          </a:prstGeom>
+          <a:noFill/>
+          <a:ln/>
+        </p:spPr>
+        <p:txBody>
+          <a:bodyPr wrap="square" lIns="0" tIns="0" rIns="0" bIns="0" rtlCol="0" anchor="t">
+            <a:normAutofit/>
+          </a:bodyPr>
+          <a:lstStyle/>
+          <a:p>
+            <a:pPr algn="l" indent="0" marL="0">
+              <a:lnSpc>
+                <a:spcPct val="108000"/>
+              </a:lnSpc>
+              <a:buNone/>
+            </a:pPr>
+            <a:r>
+              <a:rPr lang="en-US" sz="1350" dirty="0">
+                <a:solidFill>
+                  <a:srgbClr val="969695"/>
+                </a:solidFill>
+                <a:latin typeface="Source Sans 3" pitchFamily="34" charset="0"/>
+                <a:ea typeface="Source Sans 3" pitchFamily="34" charset="-122"/>
+                <a:cs typeface="Source Sans 3" pitchFamily="34" charset="-120"/>
+              </a:rPr>
+              <a:t>Comisión para el Mercado Financiero</a:t>
+            </a:r>
+            <a:endParaRPr lang="en-US" sz="1350" dirty="0"/>
+          </a:p>
+        </p:txBody>
+      </p:sp>
+      <p:sp>
+        <p:nvSpPr>
+          <p:cNvPr id="18" name="Text 14"/>
+          <p:cNvSpPr/>
+          <p:nvPr/>
+        </p:nvSpPr>
+        <p:spPr>
+          <a:xfrm>
+            <a:off x="11887200" y="9710928"/>
+            <a:ext cx="5486400" cy="292608"/>
+          </a:xfrm>
+          <a:prstGeom prst="rect">
+            <a:avLst/>
+          </a:prstGeom>
+          <a:noFill/>
+          <a:ln/>
+        </p:spPr>
+        <p:txBody>
+          <a:bodyPr wrap="square" lIns="25400" tIns="25400" rIns="25400" bIns="25400" rtlCol="0" anchor="t">
+            <a:normAutofit/>
+          </a:bodyPr>
+          <a:lstStyle/>
+          <a:p>
+            <a:pPr algn="r" indent="0" marL="0">
+              <a:lnSpc>
+                <a:spcPct val="108000"/>
+              </a:lnSpc>
+              <a:buNone/>
+            </a:pPr>
+            <a:r>
+              <a:rPr lang="en-US" sz="1350" dirty="0">
+                <a:solidFill>
+                  <a:srgbClr val="969695"/>
+                </a:solidFill>
+                <a:latin typeface="Source Sans 3" pitchFamily="34" charset="0"/>
+                <a:ea typeface="Source Sans 3" pitchFamily="34" charset="-122"/>
+                <a:cs typeface="Source Sans 3" pitchFamily="34" charset="-120"/>
+              </a:rPr>
+              <a:t>Marzo 2026 · </a:t>
+            </a:r>
+            <a:fld id="{296237B6-5E3F-4A53-8617-0B6476DA17E1}" type="slidenum">
+              <a:rPr lang="en-US" sz="1350" dirty="0">
+                <a:solidFill>
+                  <a:srgbClr val="969695"/>
+                </a:solidFill>
+                <a:latin typeface="Source Sans 3" pitchFamily="34" charset="0"/>
+                <a:ea typeface="Source Sans 3" pitchFamily="34" charset="-122"/>
+                <a:cs typeface="Source Sans 3" pitchFamily="34" charset="-120"/>
+              </a:rPr>
+              <a:t>3</a:t>
+            </a:fld>
+            <a:endParaRPr lang="en-US" sz="1350" dirty="0"/>
+          </a:p>
+        </p:txBody>
+      </p:sp>
+    </p:spTree>
+  </p:cSld>
+  <p:clrMapOvr>
+    <a:masterClrMapping/>
+  </p:clrMapOvr>
+</p:sldLayout>
+</file>
+
+<file path=ppt/slideLayouts/slideLayout4.xml><?xml version="1.0" encoding="utf-8"?>
+<p:sldLayout xmlns:p="http://schemas.openxmlformats.org/presentationml/2006/main" xmlns:a="http://schemas.openxmlformats.org/drawingml/2006/main" xmlns:r="http://schemas.openxmlformats.org/officeDocument/2006/relationships" preserve="1" type="obj">
+  <p:cSld name="CMF Contenido">
+    <p:bg>
+      <p:bgPr>
+        <a:solidFill>
+          <a:srgbClr val="FFFFFF"/>
+        </a:solidFill>
+      </p:bgPr>
+    </p:bg>
+    <p:spTree>
+      <p:nvGrpSpPr>
+        <p:cNvPr id="1" name=""/>
+        <p:cNvGrpSpPr/>
+        <p:nvPr/>
+      </p:nvGrpSpPr>
+      <p:grpSpPr>
+        <a:xfrm>
+          <a:off x="0" y="0"/>
+          <a:ext cx="0" cy="0"/>
+          <a:chOff x="0" y="0"/>
+          <a:chExt cx="0" cy="0"/>
+        </a:xfrm>
+      </p:grpSpPr>
+      <p:sp>
+        <p:nvSpPr>
+          <p:cNvPr id="2" name="Shape 0"/>
+          <p:cNvSpPr/>
+          <p:nvPr/>
+        </p:nvSpPr>
+        <p:spPr>
+          <a:xfrm>
+            <a:off x="0" y="0"/>
+            <a:ext cx="18288000" cy="114300"/>
+          </a:xfrm>
+          <a:prstGeom prst="rect">
+            <a:avLst/>
+          </a:prstGeom>
+          <a:solidFill>
+            <a:srgbClr val="5B2B82"/>
+          </a:solidFill>
+          <a:ln/>
+        </p:spPr>
+      </p:sp>
+      <p:sp>
+        <p:nvSpPr>
+          <p:cNvPr id="3" name="Text 1"/>
+          <p:cNvSpPr/>
+          <p:nvPr>
+            <p:ph type="body" idx="1"/>
+          </p:nvPr>
+        </p:nvSpPr>
+        <p:spPr>
+          <a:xfrm>
+            <a:off x="914400" y="640080"/>
+            <a:ext cx="16459200" cy="338328"/>
+          </a:xfrm>
+          <a:prstGeom prst="rect">
+            <a:avLst/>
+          </a:prstGeom>
+          <a:noFill/>
+          <a:ln/>
+        </p:spPr>
+        <p:txBody>
+          <a:bodyPr wrap="square" lIns="25400" tIns="25400" rIns="25400" bIns="25400" rtlCol="0" anchor="t">
+            <a:normAutofit/>
+          </a:bodyPr>
+          <a:lstStyle>
+            <a:lvl1pPr algn="l" indent="0" marL="0">
+              <a:lnSpc>
+                <a:spcPct val="105000"/>
+              </a:lnSpc>
+              <a:buNone/>
+              <a:defRPr sz="1575" b="1">
+                <a:solidFill>
+                  <a:srgbClr val="8547AD"/>
+                </a:solidFill>
+                <a:latin typeface="Source Sans 3" pitchFamily="34" charset="0"/>
+                <a:ea typeface="Source Sans 3" pitchFamily="34" charset="-122"/>
+                <a:cs typeface="Source Sans 3" pitchFamily="34" charset="-120"/>
+              </a:defRPr>
+            </a:lvl1pPr>
+          </a:lstStyle>
+          <a:p>
+            <a:pPr algn="l" indent="0" marL="0">
+              <a:lnSpc>
+                <a:spcPct val="105000"/>
+              </a:lnSpc>
+              <a:buNone/>
+            </a:pPr>
+            <a:r>
+              <a:rPr lang="en-US" sz="1575" b="1" spc="126" kern="0" dirty="0">
+                <a:solidFill>
+                  <a:srgbClr val="8547AD"/>
+                </a:solidFill>
+                <a:latin typeface="Source Sans 3" pitchFamily="34" charset="0"/>
+                <a:ea typeface="Source Sans 3" pitchFamily="34" charset="-122"/>
+                <a:cs typeface="Source Sans 3" pitchFamily="34" charset="-120"/>
+              </a:rPr>
+              <a:t>ANTETÍTULO DE SECCIÓN</a:t>
+            </a:r>
+            <a:endParaRPr lang="en-US" sz="1575" dirty="0"/>
+          </a:p>
+        </p:txBody>
+      </p:sp>
+      <p:pic>
+        <p:nvPicPr>
+          <p:cNvPr id="4" name="Image 0" descr="preencoded.png">    </p:cNvPr>
+          <p:cNvPicPr>
+            <a:picLocks noChangeAspect="1"/>
+          </p:cNvPicPr>
+          <p:nvPr/>
+        </p:nvPicPr>
+        <p:blipFill>
+          <a:blip r:embed="rId1"/>
+          <a:stretch>
+            <a:fillRect/>
+          </a:stretch>
+        </p:blipFill>
+        <p:spPr>
+          <a:xfrm>
+            <a:off x="15772656" y="542925"/>
+            <a:ext cx="1600944" cy="485775"/>
+          </a:xfrm>
+          <a:prstGeom prst="rect">
+            <a:avLst/>
+          </a:prstGeom>
+        </p:spPr>
+      </p:pic>
+      <p:sp>
+        <p:nvSpPr>
+          <p:cNvPr id="5" name="Text 2"/>
+          <p:cNvSpPr/>
+          <p:nvPr>
+            <p:ph type="title"/>
+          </p:nvPr>
+        </p:nvSpPr>
+        <p:spPr>
+          <a:xfrm>
+            <a:off x="914400" y="1197864"/>
+            <a:ext cx="16459200" cy="822960"/>
+          </a:xfrm>
+          <a:prstGeom prst="rect">
+            <a:avLst/>
+          </a:prstGeom>
+          <a:noFill/>
+          <a:ln/>
+        </p:spPr>
+        <p:txBody>
+          <a:bodyPr wrap="square" lIns="25400" tIns="25400" rIns="25400" bIns="25400" rtlCol="0" anchor="t">
+            <a:normAutofit/>
+          </a:bodyPr>
+          <a:lstStyle>
+            <a:lvl1pPr algn="l" indent="0" marL="0">
+              <a:lnSpc>
+                <a:spcPct val="95000"/>
+              </a:lnSpc>
+              <a:buNone/>
+              <a:defRPr sz="4275" b="1">
+                <a:solidFill>
+                  <a:srgbClr val="575756"/>
+                </a:solidFill>
+                <a:latin typeface="Verdana" pitchFamily="34" charset="0"/>
+                <a:ea typeface="Verdana" pitchFamily="34" charset="-122"/>
+                <a:cs typeface="Verdana" pitchFamily="34" charset="-120"/>
+              </a:defRPr>
+            </a:lvl1pPr>
+          </a:lstStyle>
+          <a:p>
+            <a:pPr algn="l" indent="0" marL="0">
+              <a:lnSpc>
+                <a:spcPct val="95000"/>
+              </a:lnSpc>
+              <a:buNone/>
+            </a:pPr>
+            <a:r>
+              <a:rPr lang="en-US" sz="4275" b="1" spc="-43" kern="0" dirty="0">
+                <a:solidFill>
+                  <a:srgbClr val="575756"/>
+                </a:solidFill>
+                <a:latin typeface="Verdana" pitchFamily="34" charset="0"/>
+                <a:ea typeface="Verdana" pitchFamily="34" charset="-122"/>
+                <a:cs typeface="Verdana" pitchFamily="34" charset="-120"/>
+              </a:rPr>
+              <a:t>Título de la diapositiva</a:t>
+            </a:r>
+            <a:endParaRPr lang="en-US" sz="4275" dirty="0"/>
+          </a:p>
+        </p:txBody>
+      </p:sp>
+      <p:sp>
+        <p:nvSpPr>
+          <p:cNvPr id="6" name="Shape 3"/>
+          <p:cNvSpPr/>
+          <p:nvPr/>
+        </p:nvSpPr>
+        <p:spPr>
+          <a:xfrm>
+            <a:off x="914400" y="2138809"/>
+            <a:ext cx="914400" cy="76200"/>
+          </a:xfrm>
+          <a:prstGeom prst="roundRect">
+            <a:avLst>
+              <a:gd name="adj" fmla="val 50000"/>
+            </a:avLst>
+          </a:prstGeom>
+          <a:solidFill>
+            <a:srgbClr val="5B2B82"/>
+          </a:solidFill>
+          <a:ln/>
+        </p:spPr>
+      </p:sp>
+      <p:sp>
+        <p:nvSpPr>
+          <p:cNvPr id="7" name="Shape 4"/>
+          <p:cNvSpPr/>
+          <p:nvPr/>
+        </p:nvSpPr>
+        <p:spPr>
+          <a:xfrm>
+            <a:off x="914400" y="2738884"/>
+            <a:ext cx="161925" cy="161925"/>
+          </a:xfrm>
+          <a:prstGeom prst="roundRect">
+            <a:avLst>
+              <a:gd name="adj" fmla="val 23529"/>
+            </a:avLst>
+          </a:prstGeom>
+          <a:solidFill>
+            <a:srgbClr val="12A095"/>
+          </a:solidFill>
+          <a:ln/>
+        </p:spPr>
+      </p:sp>
+      <p:sp>
+        <p:nvSpPr>
+          <p:cNvPr id="8" name="Text 5"/>
+          <p:cNvSpPr/>
+          <p:nvPr>
+            <p:ph type="body" idx="2"/>
+          </p:nvPr>
+        </p:nvSpPr>
+        <p:spPr>
+          <a:xfrm>
+            <a:off x="1280160" y="2642616"/>
+            <a:ext cx="16093440" cy="502920"/>
+          </a:xfrm>
+          <a:prstGeom prst="rect">
+            <a:avLst/>
+          </a:prstGeom>
+          <a:noFill/>
+          <a:ln/>
+        </p:spPr>
+        <p:txBody>
+          <a:bodyPr wrap="square" lIns="25400" tIns="25400" rIns="25400" bIns="25400" rtlCol="0" anchor="t">
+            <a:normAutofit/>
+          </a:bodyPr>
+          <a:lstStyle>
+            <a:lvl1pPr algn="l" indent="0" marL="0">
+              <a:lnSpc>
+                <a:spcPct val="100119"/>
+              </a:lnSpc>
+              <a:buNone/>
+              <a:defRPr sz="2175">
+                <a:solidFill>
+                  <a:srgbClr val="575756"/>
+                </a:solidFill>
+                <a:latin typeface="Source Sans 3" pitchFamily="34" charset="0"/>
+                <a:ea typeface="Source Sans 3" pitchFamily="34" charset="-122"/>
+                <a:cs typeface="Source Sans 3" pitchFamily="34" charset="-120"/>
+              </a:defRPr>
+            </a:lvl1pPr>
+          </a:lstStyle>
+          <a:p>
+            <a:pPr algn="l" indent="0" marL="0">
+              <a:lnSpc>
+                <a:spcPct val="100119"/>
+              </a:lnSpc>
+              <a:buNone/>
+            </a:pPr>
+            <a:r>
+              <a:rPr lang="en-US" sz="2175" dirty="0">
+                <a:solidFill>
+                  <a:srgbClr val="575756"/>
+                </a:solidFill>
+                <a:latin typeface="Source Sans 3" pitchFamily="34" charset="0"/>
+                <a:ea typeface="Source Sans 3" pitchFamily="34" charset="-122"/>
+                <a:cs typeface="Source Sans 3" pitchFamily="34" charset="-120"/>
+              </a:rPr>
+              <a:t>Primer punto clave de la diapositiva, con </a:t>
+            </a:r>
+            <a:pPr algn="l" indent="0" marL="0">
+              <a:lnSpc>
+                <a:spcPct val="100119"/>
+              </a:lnSpc>
+              <a:buNone/>
+            </a:pPr>
+            <a:r>
+              <a:rPr lang="en-US" sz="2175" b="1" dirty="0">
+                <a:solidFill>
+                  <a:srgbClr val="2C2C2B"/>
+                </a:solidFill>
+                <a:latin typeface="Source Sans 3" pitchFamily="34" charset="0"/>
+                <a:ea typeface="Source Sans 3" pitchFamily="34" charset="-122"/>
+                <a:cs typeface="Source Sans 3" pitchFamily="34" charset="-120"/>
+              </a:rPr>
+              <a:t>énfasis </a:t>
+            </a:r>
+            <a:pPr algn="l" indent="0" marL="0">
+              <a:lnSpc>
+                <a:spcPct val="100119"/>
+              </a:lnSpc>
+              <a:buNone/>
+            </a:pPr>
+            <a:r>
+              <a:rPr lang="en-US" sz="2175" dirty="0">
+                <a:solidFill>
+                  <a:srgbClr val="575756"/>
+                </a:solidFill>
+                <a:latin typeface="Source Sans 3" pitchFamily="34" charset="0"/>
+                <a:ea typeface="Source Sans 3" pitchFamily="34" charset="-122"/>
+                <a:cs typeface="Source Sans 3" pitchFamily="34" charset="-120"/>
+              </a:rPr>
+              <a:t>donde corresponda.</a:t>
+            </a:r>
+            <a:endParaRPr lang="en-US" sz="2175" dirty="0"/>
+          </a:p>
+        </p:txBody>
+      </p:sp>
+      <p:sp>
+        <p:nvSpPr>
+          <p:cNvPr id="9" name="Shape 6"/>
+          <p:cNvSpPr/>
+          <p:nvPr/>
+        </p:nvSpPr>
+        <p:spPr>
+          <a:xfrm>
+            <a:off x="914400" y="3396555"/>
+            <a:ext cx="161925" cy="161925"/>
+          </a:xfrm>
+          <a:prstGeom prst="roundRect">
+            <a:avLst>
+              <a:gd name="adj" fmla="val 23529"/>
+            </a:avLst>
+          </a:prstGeom>
+          <a:solidFill>
+            <a:srgbClr val="12A095"/>
+          </a:solidFill>
+          <a:ln/>
+        </p:spPr>
+      </p:sp>
+      <p:sp>
+        <p:nvSpPr>
+          <p:cNvPr id="10" name="Text 7"/>
+          <p:cNvSpPr/>
+          <p:nvPr>
+            <p:ph type="body" idx="3"/>
+          </p:nvPr>
+        </p:nvSpPr>
+        <p:spPr>
+          <a:xfrm>
+            <a:off x="1280160" y="3300984"/>
+            <a:ext cx="16093440" cy="502920"/>
+          </a:xfrm>
+          <a:prstGeom prst="rect">
+            <a:avLst/>
+          </a:prstGeom>
+          <a:noFill/>
+          <a:ln/>
+        </p:spPr>
+        <p:txBody>
+          <a:bodyPr wrap="square" lIns="25400" tIns="25400" rIns="25400" bIns="25400" rtlCol="0" anchor="t">
+            <a:normAutofit/>
+          </a:bodyPr>
+          <a:lstStyle>
+            <a:lvl1pPr algn="l" indent="0" marL="0">
+              <a:lnSpc>
+                <a:spcPct val="100119"/>
+              </a:lnSpc>
+              <a:buNone/>
+              <a:defRPr sz="2175">
+                <a:solidFill>
+                  <a:srgbClr val="575756"/>
+                </a:solidFill>
+                <a:latin typeface="Source Sans 3" pitchFamily="34" charset="0"/>
+                <a:ea typeface="Source Sans 3" pitchFamily="34" charset="-122"/>
+                <a:cs typeface="Source Sans 3" pitchFamily="34" charset="-120"/>
+              </a:defRPr>
+            </a:lvl1pPr>
+          </a:lstStyle>
+          <a:p>
+            <a:pPr algn="l" indent="0" marL="0">
+              <a:lnSpc>
+                <a:spcPct val="100119"/>
+              </a:lnSpc>
+              <a:buNone/>
+            </a:pPr>
+            <a:r>
+              <a:rPr lang="en-US" sz="2175" dirty="0">
+                <a:solidFill>
+                  <a:srgbClr val="575756"/>
+                </a:solidFill>
+                <a:latin typeface="Source Sans 3" pitchFamily="34" charset="0"/>
+                <a:ea typeface="Source Sans 3" pitchFamily="34" charset="-122"/>
+                <a:cs typeface="Source Sans 3" pitchFamily="34" charset="-120"/>
+              </a:rPr>
+              <a:t>Segundo punto clave, breve y directo.</a:t>
+            </a:r>
+            <a:endParaRPr lang="en-US" sz="2175" dirty="0"/>
+          </a:p>
+        </p:txBody>
+      </p:sp>
+      <p:sp>
+        <p:nvSpPr>
+          <p:cNvPr id="11" name="Shape 8"/>
+          <p:cNvSpPr/>
+          <p:nvPr/>
+        </p:nvSpPr>
+        <p:spPr>
+          <a:xfrm>
+            <a:off x="914400" y="4054227"/>
+            <a:ext cx="161925" cy="161925"/>
+          </a:xfrm>
+          <a:prstGeom prst="roundRect">
+            <a:avLst>
+              <a:gd name="adj" fmla="val 23529"/>
+            </a:avLst>
+          </a:prstGeom>
+          <a:solidFill>
+            <a:srgbClr val="12A095"/>
+          </a:solidFill>
+          <a:ln/>
+        </p:spPr>
+      </p:sp>
+      <p:sp>
+        <p:nvSpPr>
+          <p:cNvPr id="12" name="Text 9"/>
+          <p:cNvSpPr/>
+          <p:nvPr>
+            <p:ph type="body" idx="4"/>
+          </p:nvPr>
+        </p:nvSpPr>
+        <p:spPr>
+          <a:xfrm>
+            <a:off x="1280160" y="3959352"/>
+            <a:ext cx="16093440" cy="502920"/>
+          </a:xfrm>
+          <a:prstGeom prst="rect">
+            <a:avLst/>
+          </a:prstGeom>
+          <a:noFill/>
+          <a:ln/>
+        </p:spPr>
+        <p:txBody>
+          <a:bodyPr wrap="square" lIns="25400" tIns="25400" rIns="25400" bIns="25400" rtlCol="0" anchor="t">
+            <a:normAutofit/>
+          </a:bodyPr>
+          <a:lstStyle>
+            <a:lvl1pPr algn="l" indent="0" marL="0">
+              <a:lnSpc>
+                <a:spcPct val="100119"/>
+              </a:lnSpc>
+              <a:buNone/>
+              <a:defRPr sz="2175">
+                <a:solidFill>
+                  <a:srgbClr val="575756"/>
+                </a:solidFill>
+                <a:latin typeface="Source Sans 3" pitchFamily="34" charset="0"/>
+                <a:ea typeface="Source Sans 3" pitchFamily="34" charset="-122"/>
+                <a:cs typeface="Source Sans 3" pitchFamily="34" charset="-120"/>
+              </a:defRPr>
+            </a:lvl1pPr>
+          </a:lstStyle>
+          <a:p>
+            <a:pPr algn="l" indent="0" marL="0">
+              <a:lnSpc>
+                <a:spcPct val="100119"/>
+              </a:lnSpc>
+              <a:buNone/>
+            </a:pPr>
+            <a:r>
+              <a:rPr lang="en-US" sz="2175" dirty="0">
+                <a:solidFill>
+                  <a:srgbClr val="575756"/>
+                </a:solidFill>
+                <a:latin typeface="Source Sans 3" pitchFamily="34" charset="0"/>
+                <a:ea typeface="Source Sans 3" pitchFamily="34" charset="-122"/>
+                <a:cs typeface="Source Sans 3" pitchFamily="34" charset="-120"/>
+              </a:rPr>
+              <a:t>Tercer punto, con datos o contexto de respaldo.</a:t>
+            </a:r>
+            <a:endParaRPr lang="en-US" sz="2175" dirty="0"/>
+          </a:p>
+        </p:txBody>
+      </p:sp>
+      <p:sp>
+        <p:nvSpPr>
+          <p:cNvPr id="13" name="Shape 10"/>
+          <p:cNvSpPr/>
+          <p:nvPr/>
+        </p:nvSpPr>
+        <p:spPr>
+          <a:xfrm>
+            <a:off x="914400" y="4711898"/>
+            <a:ext cx="161925" cy="161925"/>
+          </a:xfrm>
+          <a:prstGeom prst="roundRect">
+            <a:avLst>
+              <a:gd name="adj" fmla="val 23529"/>
+            </a:avLst>
+          </a:prstGeom>
+          <a:solidFill>
+            <a:srgbClr val="12A095"/>
+          </a:solidFill>
+          <a:ln/>
+        </p:spPr>
+      </p:sp>
+      <p:sp>
+        <p:nvSpPr>
+          <p:cNvPr id="14" name="Text 11"/>
+          <p:cNvSpPr/>
+          <p:nvPr>
+            <p:ph type="body" idx="5"/>
+          </p:nvPr>
+        </p:nvSpPr>
+        <p:spPr>
+          <a:xfrm>
+            <a:off x="1280160" y="4617720"/>
+            <a:ext cx="16093440" cy="502920"/>
+          </a:xfrm>
+          <a:prstGeom prst="rect">
+            <a:avLst/>
+          </a:prstGeom>
+          <a:noFill/>
+          <a:ln/>
+        </p:spPr>
+        <p:txBody>
+          <a:bodyPr wrap="square" lIns="25400" tIns="25400" rIns="25400" bIns="25400" rtlCol="0" anchor="t">
+            <a:normAutofit/>
+          </a:bodyPr>
+          <a:lstStyle>
+            <a:lvl1pPr algn="l" indent="0" marL="0">
+              <a:lnSpc>
+                <a:spcPct val="100119"/>
+              </a:lnSpc>
+              <a:buNone/>
+              <a:defRPr sz="2175">
+                <a:solidFill>
+                  <a:srgbClr val="575756"/>
+                </a:solidFill>
+                <a:latin typeface="Source Sans 3" pitchFamily="34" charset="0"/>
+                <a:ea typeface="Source Sans 3" pitchFamily="34" charset="-122"/>
+                <a:cs typeface="Source Sans 3" pitchFamily="34" charset="-120"/>
+              </a:defRPr>
+            </a:lvl1pPr>
+          </a:lstStyle>
+          <a:p>
+            <a:pPr algn="l" indent="0" marL="0">
+              <a:lnSpc>
+                <a:spcPct val="100119"/>
+              </a:lnSpc>
+              <a:buNone/>
+            </a:pPr>
+            <a:r>
+              <a:rPr lang="en-US" sz="2175" dirty="0">
+                <a:solidFill>
+                  <a:srgbClr val="575756"/>
+                </a:solidFill>
+                <a:latin typeface="Source Sans 3" pitchFamily="34" charset="0"/>
+                <a:ea typeface="Source Sans 3" pitchFamily="34" charset="-122"/>
+                <a:cs typeface="Source Sans 3" pitchFamily="34" charset="-120"/>
+              </a:rPr>
+              <a:t>Cuarto punto, cierre o llamada a la acción.</a:t>
+            </a:r>
+            <a:endParaRPr lang="en-US" sz="2175" dirty="0"/>
+          </a:p>
+        </p:txBody>
+      </p:sp>
+      <p:sp>
+        <p:nvSpPr>
+          <p:cNvPr id="15" name="Shape 12"/>
+          <p:cNvSpPr/>
+          <p:nvPr/>
+        </p:nvSpPr>
+        <p:spPr>
+          <a:xfrm>
+            <a:off x="914400" y="9534525"/>
+            <a:ext cx="16459200" cy="9525"/>
+          </a:xfrm>
+          <a:prstGeom prst="rect">
+            <a:avLst/>
+          </a:prstGeom>
+          <a:solidFill>
+            <a:srgbClr val="D7D7D6"/>
+          </a:solidFill>
+          <a:ln/>
+        </p:spPr>
+      </p:sp>
+      <p:pic>
+        <p:nvPicPr>
+          <p:cNvPr id="16" name="Image 1" descr="preencoded.png">    </p:cNvPr>
+          <p:cNvPicPr>
+            <a:picLocks noChangeAspect="1"/>
+          </p:cNvPicPr>
+          <p:nvPr/>
+        </p:nvPicPr>
+        <p:blipFill>
+          <a:blip r:embed="rId2"/>
+          <a:stretch>
+            <a:fillRect/>
+          </a:stretch>
+        </p:blipFill>
+        <p:spPr>
+          <a:xfrm>
+            <a:off x="914400" y="9729788"/>
+            <a:ext cx="240804" cy="228600"/>
+          </a:xfrm>
+          <a:prstGeom prst="rect">
+            <a:avLst/>
+          </a:prstGeom>
+        </p:spPr>
+      </p:pic>
+      <p:sp>
+        <p:nvSpPr>
+          <p:cNvPr id="17" name="Text 13"/>
+          <p:cNvSpPr/>
+          <p:nvPr/>
+        </p:nvSpPr>
+        <p:spPr>
+          <a:xfrm>
+            <a:off x="1289304" y="9729216"/>
+            <a:ext cx="7315200" cy="274320"/>
+          </a:xfrm>
+          <a:prstGeom prst="rect">
+            <a:avLst/>
+          </a:prstGeom>
+          <a:noFill/>
+          <a:ln/>
+        </p:spPr>
+        <p:txBody>
+          <a:bodyPr wrap="square" lIns="0" tIns="0" rIns="0" bIns="0" rtlCol="0" anchor="t">
+            <a:normAutofit/>
+          </a:bodyPr>
+          <a:lstStyle/>
+          <a:p>
+            <a:pPr algn="l" indent="0" marL="0">
+              <a:lnSpc>
+                <a:spcPct val="108000"/>
+              </a:lnSpc>
+              <a:buNone/>
+            </a:pPr>
+            <a:r>
+              <a:rPr lang="en-US" sz="1350" dirty="0">
+                <a:solidFill>
+                  <a:srgbClr val="969695"/>
+                </a:solidFill>
+                <a:latin typeface="Source Sans 3" pitchFamily="34" charset="0"/>
+                <a:ea typeface="Source Sans 3" pitchFamily="34" charset="-122"/>
+                <a:cs typeface="Source Sans 3" pitchFamily="34" charset="-120"/>
+              </a:rPr>
+              <a:t>Comisión para el Mercado Financiero</a:t>
+            </a:r>
+            <a:endParaRPr lang="en-US" sz="1350" dirty="0"/>
+          </a:p>
+        </p:txBody>
+      </p:sp>
+      <p:sp>
+        <p:nvSpPr>
+          <p:cNvPr id="18" name="Text 14"/>
+          <p:cNvSpPr/>
+          <p:nvPr/>
+        </p:nvSpPr>
+        <p:spPr>
+          <a:xfrm>
+            <a:off x="11887200" y="9710928"/>
+            <a:ext cx="5486400" cy="292608"/>
+          </a:xfrm>
+          <a:prstGeom prst="rect">
+            <a:avLst/>
+          </a:prstGeom>
+          <a:noFill/>
+          <a:ln/>
+        </p:spPr>
+        <p:txBody>
+          <a:bodyPr wrap="square" lIns="25400" tIns="25400" rIns="25400" bIns="25400" rtlCol="0" anchor="t">
+            <a:normAutofit/>
+          </a:bodyPr>
+          <a:lstStyle/>
+          <a:p>
+            <a:pPr algn="r" indent="0" marL="0">
+              <a:lnSpc>
+                <a:spcPct val="108000"/>
+              </a:lnSpc>
+              <a:buNone/>
+            </a:pPr>
+            <a:r>
+              <a:rPr lang="en-US" sz="1350" dirty="0">
+                <a:solidFill>
+                  <a:srgbClr val="969695"/>
+                </a:solidFill>
+                <a:latin typeface="Source Sans 3" pitchFamily="34" charset="0"/>
+                <a:ea typeface="Source Sans 3" pitchFamily="34" charset="-122"/>
+                <a:cs typeface="Source Sans 3" pitchFamily="34" charset="-120"/>
+              </a:rPr>
+              <a:t>Marzo 2026 · </a:t>
+            </a:r>
+            <a:fld id="{B8527E0D-ED06-472B-B01F-2E0BAEC098E6}" type="slidenum">
+              <a:rPr lang="en-US" sz="1350" dirty="0">
+                <a:solidFill>
+                  <a:srgbClr val="969695"/>
+                </a:solidFill>
+                <a:latin typeface="Source Sans 3" pitchFamily="34" charset="0"/>
+                <a:ea typeface="Source Sans 3" pitchFamily="34" charset="-122"/>
+                <a:cs typeface="Source Sans 3" pitchFamily="34" charset="-120"/>
+              </a:rPr>
+              <a:t>3</a:t>
+            </a:fld>
+            <a:endParaRPr lang="en-US" sz="1350" dirty="0"/>
+          </a:p>
+        </p:txBody>
+      </p:sp>
+    </p:spTree>
+  </p:cSld>
+  <p:clrMapOvr>
+    <a:masterClrMapping/>
+  </p:clrMapOvr>
+</p:sldLayout>
+</file>
+
+<file path=ppt/slideLayouts/slideLayout5.xml><?xml version="1.0" encoding="utf-8"?>
+<p:sldLayout xmlns:p="http://schemas.openxmlformats.org/presentationml/2006/main" xmlns:a="http://schemas.openxmlformats.org/drawingml/2006/main" xmlns:r="http://schemas.openxmlformats.org/officeDocument/2006/relationships" preserve="1" type="blank">
+  <p:cSld name="CMF En blanco">
+    <p:bg>
+      <p:bgPr>
+        <a:solidFill>
+          <a:srgbClr val="FFFFFF"/>
+        </a:solidFill>
+      </p:bgPr>
+    </p:bg>
+    <p:spTree>
+      <p:nvGrpSpPr>
+        <p:cNvPr id="1" name=""/>
+        <p:cNvGrpSpPr/>
+        <p:nvPr/>
+      </p:nvGrpSpPr>
+      <p:grpSpPr>
+        <a:xfrm>
+          <a:off x="0" y="0"/>
+          <a:ext cx="0" cy="0"/>
+          <a:chOff x="0" y="0"/>
+          <a:chExt cx="0" cy="0"/>
+        </a:xfrm>
+      </p:grpSpPr>
+      <p:sp>
+        <p:nvSpPr>
+          <p:cNvPr id="2" name="Shape 0"/>
+          <p:cNvSpPr/>
+          <p:nvPr/>
+        </p:nvSpPr>
+        <p:spPr>
+          <a:xfrm>
+            <a:off x="0" y="0"/>
+            <a:ext cx="18288000" cy="114300"/>
+          </a:xfrm>
+          <a:prstGeom prst="rect">
+            <a:avLst/>
+          </a:prstGeom>
+          <a:solidFill>
+            <a:srgbClr val="5B2B82"/>
+          </a:solidFill>
+          <a:ln/>
+        </p:spPr>
+      </p:sp>
+      <p:pic>
+        <p:nvPicPr>
+          <p:cNvPr id="3" name="Image 0" descr="preencoded.png">    </p:cNvPr>
+          <p:cNvPicPr>
+            <a:picLocks noChangeAspect="1"/>
+          </p:cNvPicPr>
+          <p:nvPr/>
+        </p:nvPicPr>
+        <p:blipFill>
+          <a:blip r:embed="rId1"/>
+          <a:stretch>
+            <a:fillRect/>
+          </a:stretch>
+        </p:blipFill>
+        <p:spPr>
+          <a:xfrm>
+            <a:off x="15772656" y="542925"/>
+            <a:ext cx="1600944" cy="485775"/>
+          </a:xfrm>
+          <a:prstGeom prst="rect">
+            <a:avLst/>
+          </a:prstGeom>
+        </p:spPr>
+      </p:pic>
+      <p:sp>
+        <p:nvSpPr>
+          <p:cNvPr id="4" name="Shape 1"/>
+          <p:cNvSpPr/>
+          <p:nvPr/>
+        </p:nvSpPr>
+        <p:spPr>
+          <a:xfrm>
+            <a:off x="914400" y="9534525"/>
+            <a:ext cx="16459200" cy="9525"/>
+          </a:xfrm>
+          <a:prstGeom prst="rect">
+            <a:avLst/>
+          </a:prstGeom>
+          <a:solidFill>
+            <a:srgbClr val="D7D7D6"/>
+          </a:solidFill>
+          <a:ln/>
+        </p:spPr>
+      </p:sp>
+      <p:pic>
+        <p:nvPicPr>
+          <p:cNvPr id="5" name="Image 1" descr="preencoded.png">    </p:cNvPr>
+          <p:cNvPicPr>
+            <a:picLocks noChangeAspect="1"/>
+          </p:cNvPicPr>
+          <p:nvPr/>
+        </p:nvPicPr>
+        <p:blipFill>
+          <a:blip r:embed="rId2"/>
+          <a:stretch>
+            <a:fillRect/>
+          </a:stretch>
+        </p:blipFill>
+        <p:spPr>
+          <a:xfrm>
+            <a:off x="914400" y="9729788"/>
+            <a:ext cx="240804" cy="228600"/>
+          </a:xfrm>
+          <a:prstGeom prst="rect">
+            <a:avLst/>
+          </a:prstGeom>
+        </p:spPr>
+      </p:pic>
+      <p:sp>
+        <p:nvSpPr>
+          <p:cNvPr id="6" name="Text 2"/>
+          <p:cNvSpPr/>
+          <p:nvPr/>
+        </p:nvSpPr>
+        <p:spPr>
+          <a:xfrm>
+            <a:off x="1289304" y="9729216"/>
+            <a:ext cx="7315200" cy="274320"/>
+          </a:xfrm>
+          <a:prstGeom prst="rect">
+            <a:avLst/>
+          </a:prstGeom>
+          <a:noFill/>
+          <a:ln/>
+        </p:spPr>
+        <p:txBody>
+          <a:bodyPr wrap="square" lIns="0" tIns="0" rIns="0" bIns="0" rtlCol="0" anchor="t">
+            <a:normAutofit/>
+          </a:bodyPr>
+          <a:lstStyle/>
+          <a:p>
+            <a:pPr algn="l" indent="0" marL="0">
+              <a:lnSpc>
+                <a:spcPct val="108000"/>
+              </a:lnSpc>
+              <a:buNone/>
+            </a:pPr>
+            <a:r>
+              <a:rPr lang="en-US" sz="1350" dirty="0">
+                <a:solidFill>
+                  <a:srgbClr val="969695"/>
+                </a:solidFill>
+                <a:latin typeface="Source Sans 3" pitchFamily="34" charset="0"/>
+                <a:ea typeface="Source Sans 3" pitchFamily="34" charset="-122"/>
+                <a:cs typeface="Source Sans 3" pitchFamily="34" charset="-120"/>
+              </a:rPr>
+              <a:t>Comisión para el Mercado Financiero</a:t>
+            </a:r>
+            <a:endParaRPr lang="en-US" sz="1350" dirty="0"/>
+          </a:p>
+        </p:txBody>
+      </p:sp>
+      <p:sp>
+        <p:nvSpPr>
+          <p:cNvPr id="7" name="Text 3"/>
+          <p:cNvSpPr/>
+          <p:nvPr/>
+        </p:nvSpPr>
+        <p:spPr>
+          <a:xfrm>
+            <a:off x="11887200" y="9710928"/>
+            <a:ext cx="5486400" cy="292608"/>
+          </a:xfrm>
+          <a:prstGeom prst="rect">
+            <a:avLst/>
+          </a:prstGeom>
+          <a:noFill/>
+          <a:ln/>
+        </p:spPr>
+        <p:txBody>
+          <a:bodyPr wrap="square" lIns="25400" tIns="25400" rIns="25400" bIns="25400" rtlCol="0" anchor="t">
+            <a:normAutofit/>
+          </a:bodyPr>
+          <a:lstStyle/>
+          <a:p>
+            <a:pPr algn="r" indent="0" marL="0">
+              <a:lnSpc>
+                <a:spcPct val="108000"/>
+              </a:lnSpc>
+              <a:buNone/>
+            </a:pPr>
+            <a:r>
+              <a:rPr lang="en-US" sz="1350" dirty="0">
+                <a:solidFill>
+                  <a:srgbClr val="969695"/>
+                </a:solidFill>
+                <a:latin typeface="Source Sans 3" pitchFamily="34" charset="0"/>
+                <a:ea typeface="Source Sans 3" pitchFamily="34" charset="-122"/>
+                <a:cs typeface="Source Sans 3" pitchFamily="34" charset="-120"/>
+              </a:rPr>
+              <a:t>Marzo 2026 · </a:t>
+            </a:r>
+            <a:fld id="{98A198A5-C19F-473F-9A80-43D657BB568F}" type="slidenum">
+              <a:rPr lang="en-US" sz="1350" dirty="0">
+                <a:solidFill>
+                  <a:srgbClr val="969695"/>
+                </a:solidFill>
+                <a:latin typeface="Source Sans 3" pitchFamily="34" charset="0"/>
+                <a:ea typeface="Source Sans 3" pitchFamily="34" charset="-122"/>
+                <a:cs typeface="Source Sans 3" pitchFamily="34" charset="-120"/>
+              </a:rPr>
+              <a:t>2</a:t>
+            </a:fld>
+            <a:endParaRPr lang="en-US" sz="1350" dirty="0"/>
+          </a:p>
+        </p:txBody>
+      </p:sp>
+    </p:spTree>
+  </p:cSld>
+  <p:clrMapOvr>
+    <a:masterClrMapping/>
+  </p:clrMapOvr>
+</p:sldLayout>
+</file>
+
 <file path=ppt/slideMasters/slideMaster1.xml><?xml version="1.0" encoding="utf-8"?>
 <p:sldMaster xmlns:a="http://schemas.openxmlformats.org/drawingml/2006/main" xmlns:r="http://schemas.openxmlformats.org/officeDocument/2006/relationships" xmlns:p="http://schemas.openxmlformats.org/presentationml/2006/main">
   <p:cSld>
@@ -774,6 +2512,10 @@
   <p:clrMap bg1="lt1" tx1="dk1" bg2="lt2" tx2="dk2" accent1="accent1" accent2="accent2" accent3="accent3" accent4="accent4" accent5="accent5" accent6="accent6" hlink="hlink" folHlink="folHlink"/>
   <p:sldLayoutIdLst>
     <p:sldLayoutId id="2147483649" r:id="rId1"/>
+    <p:sldLayoutId id="2147483652" r:id="rIdL2"/>
+    <p:sldLayoutId id="2147483653" r:id="rIdL3"/>
+    <p:sldLayoutId id="2147483654" r:id="rIdL4"/>
+    <p:sldLayoutId id="2147483655" r:id="rIdL5"/>
   </p:sldLayoutIdLst>
   <p:hf sldNum="0" hdr="0" ftr="0" dt="0"/>
   <p:txStyles>
@@ -2486,4 +4228,299 @@
     </a:ext>
   </a:extLst>
 </a:theme>
+</file>
+
+<file path=ppt/theme/theme2.xml><?xml version="1.0" encoding="utf-8"?>
+<a:theme xmlns:a="http://schemas.openxmlformats.org/drawingml/2006/main" name="Office Theme Notas">
+  <a:themeElements>
+    <a:clrScheme name="Office">
+      <a:dk1>
+        <a:sysClr val="windowText" lastClr="000000"/>
+      </a:dk1>
+      <a:lt1>
+        <a:sysClr val="window" lastClr="FFFFFF"/>
+      </a:lt1>
+      <a:dk2>
+        <a:srgbClr val="44546A"/>
+      </a:dk2>
+      <a:lt2>
+        <a:srgbClr val="E7E6E6"/>
+      </a:lt2>
+      <a:accent1>
+        <a:srgbClr val="4472C4"/>
+      </a:accent1>
+      <a:accent2>
+        <a:srgbClr val="ED7D31"/>
+      </a:accent2>
+      <a:accent3>
+        <a:srgbClr val="A5A5A5"/>
+      </a:accent3>
+      <a:accent4>
+        <a:srgbClr val="FFC000"/>
+      </a:accent4>
+      <a:accent5>
+        <a:srgbClr val="5B9BD5"/>
+      </a:accent5>
+      <a:accent6>
+        <a:srgbClr val="70AD47"/>
+      </a:accent6>
+      <a:hlink>
+        <a:srgbClr val="0563C1"/>
+      </a:hlink>
+      <a:folHlink>
+        <a:srgbClr val="954F72"/>
+      </a:folHlink>
+    </a:clrScheme>
+    <a:fontScheme name="Office">
+      <a:majorFont>
+        <a:latin typeface="Calibri Light" panose="020F0302020204030204"/>
+        <a:ea typeface=""/>
+        <a:cs typeface=""/>
+        <a:font script="Jpan" typeface="游ゴシック Light"/>
+        <a:font script="Hang" typeface="맑은 고딕"/>
+        <a:font script="Hans" typeface="等线 Light"/>
+        <a:font script="Hant" typeface="新細明體"/>
+        <a:font script="Arab" typeface="Times New Roman"/>
+        <a:font script="Hebr" typeface="Times New Roman"/>
+        <a:font script="Thai" typeface="Angsana New"/>
+        <a:font script="Ethi" typeface="Nyala"/>
+        <a:font script="Beng" typeface="Vrinda"/>
+        <a:font script="Gujr" typeface="Shruti"/>
+        <a:font script="Khmr" typeface="MoolBoran"/>
+        <a:font script="Knda" typeface="Tunga"/>
+        <a:font script="Guru" typeface="Raavi"/>
+        <a:font script="Cans" typeface="Euphemia"/>
+        <a:font script="Cher" typeface="Plantagenet Cherokee"/>
+        <a:font script="Yiii" typeface="Microsoft Yi Baiti"/>
+        <a:font script="Tibt" typeface="Microsoft Himalaya"/>
+        <a:font script="Thaa" typeface="MV Boli"/>
+        <a:font script="Deva" typeface="Mangal"/>
+        <a:font script="Telu" typeface="Gautami"/>
+        <a:font script="Taml" typeface="Latha"/>
+        <a:font script="Syrc" typeface="Estrangelo Edessa"/>
+        <a:font script="Orya" typeface="Kalinga"/>
+        <a:font script="Mlym" typeface="Kartika"/>
+        <a:font script="Laoo" typeface="DokChampa"/>
+        <a:font script="Sinh" typeface="Iskoola Pota"/>
+        <a:font script="Mong" typeface="Mongolian Baiti"/>
+        <a:font script="Viet" typeface="Times New Roman"/>
+        <a:font script="Uigh" typeface="Microsoft Uighur"/>
+        <a:font script="Geor" typeface="Sylfaen"/>
+        <a:font script="Armn" typeface="Arial"/>
+        <a:font script="Bugi" typeface="Leelawadee UI"/>
+        <a:font script="Bopo" typeface="Microsoft JhengHei"/>
+        <a:font script="Java" typeface="Javanese Text"/>
+        <a:font script="Lisu" typeface="Segoe UI"/>
+        <a:font script="Mymr" typeface="Myanmar Text"/>
+        <a:font script="Nkoo" typeface="Ebrima"/>
+        <a:font script="Olck" typeface="Nirmala UI"/>
+        <a:font script="Osma" typeface="Ebrima"/>
+        <a:font script="Phag" typeface="Phagspa"/>
+        <a:font script="Syrn" typeface="Estrangelo Edessa"/>
+        <a:font script="Syrj" typeface="Estrangelo Edessa"/>
+        <a:font script="Syre" typeface="Estrangelo Edessa"/>
+        <a:font script="Sora" typeface="Nirmala UI"/>
+        <a:font script="Tale" typeface="Microsoft Tai Le"/>
+        <a:font script="Talu" typeface="Microsoft New Tai Lue"/>
+        <a:font script="Tfng" typeface="Ebrima"/>
+      </a:majorFont>
+      <a:minorFont>
+        <a:latin typeface="Calibri" panose="020F0502020204030204"/>
+        <a:ea typeface=""/>
+        <a:cs typeface=""/>
+        <a:font script="Jpan" typeface="游ゴシック"/>
+        <a:font script="Hang" typeface="맑은 고딕"/>
+        <a:font script="Hans" typeface="等线"/>
+        <a:font script="Hant" typeface="新細明體"/>
+        <a:font script="Arab" typeface="Arial"/>
+        <a:font script="Hebr" typeface="Arial"/>
+        <a:font script="Thai" typeface="Cordia New"/>
+        <a:font script="Ethi" typeface="Nyala"/>
+        <a:font script="Beng" typeface="Vrinda"/>
+        <a:font script="Gujr" typeface="Shruti"/>
+        <a:font script="Khmr" typeface="DaunPenh"/>
+        <a:font script="Knda" typeface="Tunga"/>
+        <a:font script="Guru" typeface="Raavi"/>
+        <a:font script="Cans" typeface="Euphemia"/>
+        <a:font script="Cher" typeface="Plantagenet Cherokee"/>
+        <a:font script="Yiii" typeface="Microsoft Yi Baiti"/>
+        <a:font script="Tibt" typeface="Microsoft Himalaya"/>
+        <a:font script="Thaa" typeface="MV Boli"/>
+        <a:font script="Deva" typeface="Mangal"/>
+        <a:font script="Telu" typeface="Gautami"/>
+        <a:font script="Taml" typeface="Latha"/>
+        <a:font script="Syrc" typeface="Estrangelo Edessa"/>
+        <a:font script="Orya" typeface="Kalinga"/>
+        <a:font script="Mlym" typeface="Kartika"/>
+        <a:font script="Laoo" typeface="DokChampa"/>
+        <a:font script="Sinh" typeface="Iskoola Pota"/>
+        <a:font script="Mong" typeface="Mongolian Baiti"/>
+        <a:font script="Viet" typeface="Arial"/>
+        <a:font script="Uigh" typeface="Microsoft Uighur"/>
+        <a:font script="Geor" typeface="Sylfaen"/>
+        <a:font script="Armn" typeface="Arial"/>
+        <a:font script="Bugi" typeface="Leelawadee UI"/>
+        <a:font script="Bopo" typeface="Microsoft JhengHei"/>
+        <a:font script="Java" typeface="Javanese Text"/>
+        <a:font script="Lisu" typeface="Segoe UI"/>
+        <a:font script="Mymr" typeface="Myanmar Text"/>
+        <a:font script="Nkoo" typeface="Ebrima"/>
+        <a:font script="Olck" typeface="Nirmala UI"/>
+        <a:font script="Osma" typeface="Ebrima"/>
+        <a:font script="Phag" typeface="Phagspa"/>
+        <a:font script="Syrn" typeface="Estrangelo Edessa"/>
+        <a:font script="Syrj" typeface="Estrangelo Edessa"/>
+        <a:font script="Syre" typeface="Estrangelo Edessa"/>
+        <a:font script="Sora" typeface="Nirmala UI"/>
+        <a:font script="Tale" typeface="Microsoft Tai Le"/>
+        <a:font script="Talu" typeface="Microsoft New Tai Lue"/>
+        <a:font script="Tfng" typeface="Ebrima"/>
+      </a:minorFont>
+    </a:fontScheme>
+    <a:fmtScheme name="Office">
+      <a:fillStyleLst>
+        <a:solidFill>
+          <a:schemeClr val="phClr"/>
+        </a:solidFill>
+        <a:gradFill rotWithShape="1">
+          <a:gsLst>
+            <a:gs pos="0">
+              <a:schemeClr val="phClr">
+                <a:lumMod val="110000"/>
+                <a:satMod val="105000"/>
+                <a:tint val="67000"/>
+              </a:schemeClr>
+            </a:gs>
+            <a:gs pos="50000">
+              <a:schemeClr val="phClr">
+                <a:lumMod val="105000"/>
+                <a:satMod val="103000"/>
+                <a:tint val="73000"/>
+              </a:schemeClr>
+            </a:gs>
+            <a:gs pos="100000">
+              <a:schemeClr val="phClr">
+                <a:lumMod val="105000"/>
+                <a:satMod val="109000"/>
+                <a:tint val="81000"/>
+              </a:schemeClr>
+            </a:gs>
+          </a:gsLst>
+          <a:lin ang="5400000" scaled="0"/>
+        </a:gradFill>
+        <a:gradFill rotWithShape="1">
+          <a:gsLst>
+            <a:gs pos="0">
+              <a:schemeClr val="phClr">
+                <a:satMod val="103000"/>
+                <a:lumMod val="102000"/>
+                <a:tint val="94000"/>
+              </a:schemeClr>
+            </a:gs>
+            <a:gs pos="50000">
+              <a:schemeClr val="phClr">
+                <a:satMod val="110000"/>
+                <a:lumMod val="100000"/>
+                <a:shade val="100000"/>
+              </a:schemeClr>
+            </a:gs>
+            <a:gs pos="100000">
+              <a:schemeClr val="phClr">
+                <a:lumMod val="99000"/>
+                <a:satMod val="120000"/>
+                <a:shade val="78000"/>
+              </a:schemeClr>
+            </a:gs>
+          </a:gsLst>
+          <a:lin ang="5400000" scaled="0"/>
+        </a:gradFill>
+      </a:fillStyleLst>
+      <a:lnStyleLst>
+        <a:ln w="6350" cap="flat" cmpd="sng" algn="ctr">
+          <a:solidFill>
+            <a:schemeClr val="phClr"/>
+          </a:solidFill>
+          <a:prstDash val="solid"/>
+          <a:miter lim="800000"/>
+        </a:ln>
+        <a:ln w="12700" cap="flat" cmpd="sng" algn="ctr">
+          <a:solidFill>
+            <a:schemeClr val="phClr"/>
+          </a:solidFill>
+          <a:prstDash val="solid"/>
+          <a:miter lim="800000"/>
+        </a:ln>
+        <a:ln w="19050" cap="flat" cmpd="sng" algn="ctr">
+          <a:solidFill>
+            <a:schemeClr val="phClr"/>
+          </a:solidFill>
+          <a:prstDash val="solid"/>
+          <a:miter lim="800000"/>
+        </a:ln>
+      </a:lnStyleLst>
+      <a:effectStyleLst>
+        <a:effectStyle>
+          <a:effectLst/>
+        </a:effectStyle>
+        <a:effectStyle>
+          <a:effectLst/>
+        </a:effectStyle>
+        <a:effectStyle>
+          <a:effectLst>
+            <a:outerShdw blurRad="57150" dist="19050" dir="5400000" algn="ctr" rotWithShape="0">
+              <a:srgbClr val="000000">
+                <a:alpha val="63000"/>
+              </a:srgbClr>
+            </a:outerShdw>
+          </a:effectLst>
+        </a:effectStyle>
+      </a:effectStyleLst>
+      <a:bgFillStyleLst>
+        <a:solidFill>
+          <a:schemeClr val="phClr"/>
+        </a:solidFill>
+        <a:solidFill>
+          <a:schemeClr val="phClr">
+            <a:tint val="95000"/>
+            <a:satMod val="170000"/>
+          </a:schemeClr>
+        </a:solidFill>
+        <a:gradFill rotWithShape="1">
+          <a:gsLst>
+            <a:gs pos="0">
+              <a:schemeClr val="phClr">
+                <a:tint val="93000"/>
+                <a:satMod val="150000"/>
+                <a:shade val="98000"/>
+                <a:lumMod val="102000"/>
+              </a:schemeClr>
+            </a:gs>
+            <a:gs pos="50000">
+              <a:schemeClr val="phClr">
+                <a:tint val="98000"/>
+                <a:satMod val="130000"/>
+                <a:shade val="90000"/>
+                <a:lumMod val="103000"/>
+              </a:schemeClr>
+            </a:gs>
+            <a:gs pos="100000">
+              <a:schemeClr val="phClr">
+                <a:shade val="63000"/>
+                <a:satMod val="120000"/>
+              </a:schemeClr>
+            </a:gs>
+          </a:gsLst>
+          <a:lin ang="5400000" scaled="0"/>
+        </a:gradFill>
+      </a:bgFillStyleLst>
+    </a:fmtScheme>
+  </a:themeElements>
+  <a:objectDefaults/>
+  <a:extraClrSchemeLst/>
+  <a:extLst>
+    <a:ext uri="{05A4C25C-085E-4340-85A3-A5531E510DB2}">
+      <thm15:themeFamily xmlns:thm15="http://schemas.microsoft.com/office/thememl/2012/main" name="Office Theme" id="{62F939B6-93AF-4DB8-9C6B-D6C7DFDC589F}" vid="{4A3C46E8-61CC-4603-A589-7422A47A8E4A}"/>
+    </a:ext>
+  </a:extLst>
+</a:theme>
 </file>
--- a/guidelines/CMF-plantilla-2026.pptx
+++ b/guidelines/CMF-plantilla-2026.pptx
@@ -1154,7 +1154,7 @@
               </a:lnSpc>
               <a:buNone/>
             </a:pPr>
-            <a:fld id="{B5E4E44B-B729-4933-9576-2397FE414F70}" type="slidenum">
+            <a:fld id="{EA582884-136E-4DE1-9188-DA0349807FE5}" type="slidenum">
               <a:rPr lang="en-US" sz="1200" dirty="0">
                 <a:solidFill>
                   <a:srgbClr val="FFFFFF">
@@ -1519,7 +1519,7 @@
               </a:rPr>
               <a:t>Marzo 2026 · </a:t>
             </a:r>
-            <a:fld id="{296237B6-5E3F-4A53-8617-0B6476DA17E1}" type="slidenum">
+            <a:fld id="{218D0039-912B-421F-87CD-0FAC6475F823}" type="slidenum">
               <a:rPr lang="en-US" sz="1350" dirty="0">
                 <a:solidFill>
                   <a:srgbClr val="969695"/>
@@ -2248,7 +2248,7 @@
               </a:rPr>
               <a:t>Marzo 2026 · </a:t>
             </a:r>
-            <a:fld id="{B8527E0D-ED06-472B-B01F-2E0BAEC098E6}" type="slidenum">
+            <a:fld id="{BBFADF48-F6C2-42CE-A217-E5975670DAB2}" type="slidenum">
               <a:rPr lang="en-US" sz="1350" dirty="0">
                 <a:solidFill>
                   <a:srgbClr val="969695"/>
@@ -2467,7 +2467,7 @@
               </a:rPr>
               <a:t>Marzo 2026 · </a:t>
             </a:r>
-            <a:fld id="{98A198A5-C19F-473F-9A80-43D657BB568F}" type="slidenum">
+            <a:fld id="{5013A543-B1DB-41B9-8256-8791F49E8128}" type="slidenum">
               <a:rPr lang="en-US" sz="1350" dirty="0">
                 <a:solidFill>
                   <a:srgbClr val="969695"/>
@@ -2479,6 +2479,279 @@
               <a:t>2</a:t>
             </a:fld>
             <a:endParaRPr lang="en-US" sz="1350" dirty="0"/>
+          </a:p>
+        </p:txBody>
+      </p:sp>
+    </p:spTree>
+  </p:cSld>
+  <p:clrMapOvr>
+    <a:masterClrMapping/>
+  </p:clrMapOvr>
+</p:sldLayout>
+</file>
+
+<file path=ppt/slideLayouts/slideLayout6.xml><?xml version="1.0" encoding="utf-8"?>
+<p:sldLayout xmlns:a="http://schemas.openxmlformats.org/drawingml/2006/main" xmlns:r="http://schemas.openxmlformats.org/officeDocument/2006/relationships" xmlns:p="http://schemas.openxmlformats.org/presentationml/2006/main" preserve="1" type="secHead">
+  <p:cSld name="CMF Separador">
+    <p:spTree>
+      <p:nvGrpSpPr>
+        <p:cNvPr id="1" name=""/>
+        <p:cNvGrpSpPr/>
+        <p:nvPr/>
+      </p:nvGrpSpPr>
+      <p:grpSpPr/>
+      <p:sp>
+        <p:nvSpPr>
+          <p:cNvPr id="2" name="Fondo"/>
+          <p:cNvSpPr/>
+          <p:nvPr/>
+        </p:nvSpPr>
+        <p:spPr>
+          <a:xfrm>
+            <a:off x="0" y="0"/>
+            <a:ext cx="18288000" cy="10287000"/>
+          </a:xfrm>
+          <a:prstGeom prst="rect">
+            <a:avLst/>
+          </a:prstGeom>
+          <a:solidFill>
+            <a:srgbClr val="162C55"/>
+          </a:solidFill>
+          <a:ln>
+            <a:noFill/>
+          </a:ln>
+        </p:spPr>
+      </p:sp>
+      <p:sp>
+        <p:nvSpPr>
+          <p:cNvPr id="3" name="Numero"/>
+          <p:cNvSpPr/>
+          <p:nvPr>
+            <p:ph type="body" idx="4"/>
+          </p:nvPr>
+        </p:nvSpPr>
+        <p:spPr>
+          <a:xfrm>
+            <a:off x="12252960" y="960120"/>
+            <a:ext cx="4754880" cy="4754880"/>
+          </a:xfrm>
+          <a:prstGeom prst="rect">
+            <a:avLst/>
+          </a:prstGeom>
+          <a:noFill/>
+        </p:spPr>
+        <p:txBody>
+          <a:bodyPr wrap="square" lIns="0" tIns="0" rIns="0" bIns="0" anchor="t"/>
+          <a:lstStyle>
+            <a:lvl1pPr algn="r" marL="0" indent="0">
+              <a:buNone/>
+              <a:defRPr sz="21000" b="1">
+                <a:solidFill>
+                  <a:srgbClr val="3F3A7E"/>
+                </a:solidFill>
+                <a:latin typeface="Verdana"/>
+              </a:defRPr>
+            </a:lvl1pPr>
+          </a:lstStyle>
+          <a:p>
+            <a:pPr algn="r">
+              <a:buNone/>
+            </a:pPr>
+            <a:endParaRPr/>
+          </a:p>
+        </p:txBody>
+      </p:sp>
+      <p:sp>
+        <p:nvSpPr>
+          <p:cNvPr id="4" name="Antetitulo"/>
+          <p:cNvSpPr/>
+          <p:nvPr>
+            <p:ph type="body" idx="1"/>
+          </p:nvPr>
+        </p:nvSpPr>
+        <p:spPr>
+          <a:xfrm>
+            <a:off x="1280160" y="3794760"/>
+            <a:ext cx="10058400" cy="365760"/>
+          </a:xfrm>
+          <a:prstGeom prst="rect">
+            <a:avLst/>
+          </a:prstGeom>
+          <a:noFill/>
+        </p:spPr>
+        <p:txBody>
+          <a:bodyPr wrap="square" lIns="0" tIns="0" rIns="0" bIns="0" anchor="t"/>
+          <a:lstStyle>
+            <a:lvl1pPr algn="l" marL="0" indent="0">
+              <a:buNone/>
+              <a:defRPr sz="1575" b="1" cap="all">
+                <a:solidFill>
+                  <a:srgbClr val="97D6D2"/>
+                </a:solidFill>
+                <a:latin typeface="Source Sans 3"/>
+              </a:defRPr>
+            </a:lvl1pPr>
+          </a:lstStyle>
+          <a:p>
+            <a:pPr algn="l">
+              <a:buNone/>
+            </a:pPr>
+            <a:endParaRPr/>
+          </a:p>
+        </p:txBody>
+      </p:sp>
+      <p:sp>
+        <p:nvSpPr>
+          <p:cNvPr id="5" name="Regla"/>
+          <p:cNvSpPr/>
+          <p:nvPr/>
+        </p:nvSpPr>
+        <p:spPr>
+          <a:xfrm>
+            <a:off x="1280160" y="4453128"/>
+            <a:ext cx="1463040" cy="91440"/>
+          </a:xfrm>
+          <a:prstGeom prst="rect">
+            <a:avLst/>
+          </a:prstGeom>
+          <a:solidFill>
+            <a:srgbClr val="8547AD"/>
+          </a:solidFill>
+          <a:ln>
+            <a:noFill/>
+          </a:ln>
+        </p:spPr>
+      </p:sp>
+      <p:sp>
+        <p:nvSpPr>
+          <p:cNvPr id="6" name="Titulo"/>
+          <p:cNvSpPr/>
+          <p:nvPr>
+            <p:ph type="title"/>
+          </p:nvPr>
+        </p:nvSpPr>
+        <p:spPr>
+          <a:xfrm>
+            <a:off x="1280160" y="4846320"/>
+            <a:ext cx="10058400" cy="1554480"/>
+          </a:xfrm>
+          <a:prstGeom prst="rect">
+            <a:avLst/>
+          </a:prstGeom>
+          <a:noFill/>
+        </p:spPr>
+        <p:txBody>
+          <a:bodyPr wrap="square" lIns="0" tIns="0" rIns="0" bIns="0" anchor="t"/>
+          <a:lstStyle>
+            <a:lvl1pPr algn="l" marL="0" indent="0">
+              <a:buNone/>
+              <a:defRPr sz="5200" b="1">
+                <a:solidFill>
+                  <a:srgbClr val="FFFFFF"/>
+                </a:solidFill>
+                <a:latin typeface="Verdana"/>
+              </a:defRPr>
+            </a:lvl1pPr>
+          </a:lstStyle>
+          <a:p>
+            <a:pPr algn="l">
+              <a:buNone/>
+            </a:pPr>
+            <a:endParaRPr/>
+          </a:p>
+        </p:txBody>
+      </p:sp>
+      <p:sp>
+        <p:nvSpPr>
+          <p:cNvPr id="7" name="Bajada"/>
+          <p:cNvSpPr/>
+          <p:nvPr>
+            <p:ph type="body" idx="2"/>
+          </p:nvPr>
+        </p:nvSpPr>
+        <p:spPr>
+          <a:xfrm>
+            <a:off x="1280160" y="6812280"/>
+            <a:ext cx="9692640" cy="1188720"/>
+          </a:xfrm>
+          <a:prstGeom prst="rect">
+            <a:avLst/>
+          </a:prstGeom>
+          <a:noFill/>
+        </p:spPr>
+        <p:txBody>
+          <a:bodyPr wrap="square" lIns="0" tIns="0" rIns="0" bIns="0" anchor="t"/>
+          <a:lstStyle>
+            <a:lvl1pPr algn="l" marL="0" indent="0">
+              <a:buNone/>
+              <a:defRPr sz="1800">
+                <a:solidFill>
+                  <a:srgbClr val="97D6D2"/>
+                </a:solidFill>
+                <a:latin typeface="Source Sans 3"/>
+              </a:defRPr>
+            </a:lvl1pPr>
+          </a:lstStyle>
+          <a:p>
+            <a:pPr algn="l">
+              <a:buNone/>
+            </a:pPr>
+            <a:endParaRPr/>
+          </a:p>
+        </p:txBody>
+      </p:sp>
+      <p:pic>
+        <p:nvPicPr>
+          <p:cNvPr id="8" name="Logo"/>
+          <p:cNvPicPr/>
+          <p:nvPr/>
+        </p:nvPicPr>
+        <p:blipFill>
+          <a:blip r:embed="rIdLogo"/>
+          <a:stretch>
+            <a:fillRect/>
+          </a:stretch>
+        </p:blipFill>
+        <p:spPr>
+          <a:xfrm>
+            <a:off x="1280160" y="8549640"/>
+            <a:ext cx="2412336" cy="566928"/>
+          </a:xfrm>
+          <a:prstGeom prst="rect">
+            <a:avLst/>
+          </a:prstGeom>
+        </p:spPr>
+      </p:pic>
+      <p:sp>
+        <p:nvSpPr>
+          <p:cNvPr id="9" name="Folio"/>
+          <p:cNvSpPr txBox="1"/>
+          <p:nvPr/>
+        </p:nvSpPr>
+        <p:spPr>
+          <a:xfrm>
+            <a:off x="11887200" y="8796528"/>
+            <a:ext cx="5486400" cy="310896"/>
+          </a:xfrm>
+          <a:prstGeom prst="rect">
+            <a:avLst/>
+          </a:prstGeom>
+          <a:noFill/>
+        </p:spPr>
+        <p:txBody>
+          <a:bodyPr wrap="square" lIns="0" tIns="0" rIns="0" bIns="0"/>
+          <a:lstStyle/>
+          <a:p>
+            <a:pPr algn="r"/>
+            <a:fld id="{48E3CD97-923D-4D67-A203-2AB031981B28}" type="slidenum">
+              <a:rPr lang="es-CL" sz="1200">
+                <a:solidFill>
+                  <a:srgbClr val="D7D7D6"/>
+                </a:solidFill>
+                <a:latin typeface="Source Sans 3"/>
+              </a:rPr>
+              <a:t>2</a:t>
+            </a:fld>
           </a:p>
         </p:txBody>
       </p:sp>
@@ -2516,6 +2789,7 @@
     <p:sldLayoutId id="2147483653" r:id="rIdL3"/>
     <p:sldLayoutId id="2147483654" r:id="rIdL4"/>
     <p:sldLayoutId id="2147483655" r:id="rIdL5"/>
+    <p:sldLayoutId id="2147483656" r:id="rIdL6"/>
   </p:sldLayoutIdLst>
   <p:hf sldNum="0" hdr="0" ftr="0" dt="0"/>
   <p:txStyles>

--- a/guidelines/CMF-plantilla-2026.pptx
+++ b/guidelines/CMF-plantilla-2026.pptx
@@ -1154,7 +1154,7 @@
               </a:lnSpc>
               <a:buNone/>
             </a:pPr>
-            <a:fld id="{EA582884-136E-4DE1-9188-DA0349807FE5}" type="slidenum">
+            <a:fld id="{9EBC56F6-7EC8-4C52-96F4-6B5BB50A2EF3}" type="slidenum">
               <a:rPr lang="en-US" sz="1200" dirty="0">
                 <a:solidFill>
                   <a:srgbClr val="FFFFFF">
@@ -1519,7 +1519,7 @@
               </a:rPr>
               <a:t>Marzo 2026 · </a:t>
             </a:r>
-            <a:fld id="{218D0039-912B-421F-87CD-0FAC6475F823}" type="slidenum">
+            <a:fld id="{201E33D4-A69F-43E0-958C-51F3B5B92960}" type="slidenum">
               <a:rPr lang="en-US" sz="1350" dirty="0">
                 <a:solidFill>
                   <a:srgbClr val="969695"/>
@@ -2248,7 +2248,7 @@
               </a:rPr>
               <a:t>Marzo 2026 · </a:t>
             </a:r>
-            <a:fld id="{BBFADF48-F6C2-42CE-A217-E5975670DAB2}" type="slidenum">
+            <a:fld id="{387E7632-27A4-47AC-BF97-389FCA0804B8}" type="slidenum">
               <a:rPr lang="en-US" sz="1350" dirty="0">
                 <a:solidFill>
                   <a:srgbClr val="969695"/>
@@ -2467,7 +2467,7 @@
               </a:rPr>
               <a:t>Marzo 2026 · </a:t>
             </a:r>
-            <a:fld id="{5013A543-B1DB-41B9-8256-8791F49E8128}" type="slidenum">
+            <a:fld id="{3D711F8A-CBC7-44F2-A0CF-4489B9088FB4}" type="slidenum">
               <a:rPr lang="en-US" sz="1350" dirty="0">
                 <a:solidFill>
                   <a:srgbClr val="969695"/>
@@ -2743,7 +2743,7 @@
           <a:lstStyle/>
           <a:p>
             <a:pPr algn="r"/>
-            <a:fld id="{48E3CD97-923D-4D67-A203-2AB031981B28}" type="slidenum">
+            <a:fld id="{A629DC97-EA9D-4BD7-8512-A752779A19D7}" type="slidenum">
               <a:rPr lang="es-CL" sz="1200">
                 <a:solidFill>
                   <a:srgbClr val="D7D7D6"/>

--- a/guidelines/CMF-plantilla-2026.pptx
+++ b/guidelines/CMF-plantilla-2026.pptx
@@ -1154,7 +1154,7 @@
               </a:lnSpc>
               <a:buNone/>
             </a:pPr>
-            <a:fld id="{B5E4E44B-B729-4933-9576-2397FE414F70}" type="slidenum">
+            <a:fld id="{9EBC56F6-7EC8-4C52-96F4-6B5BB50A2EF3}" type="slidenum">
               <a:rPr lang="en-US" sz="1200" dirty="0">
                 <a:solidFill>
                   <a:srgbClr val="FFFFFF">
@@ -1519,7 +1519,7 @@
               </a:rPr>
               <a:t>Marzo 2026 · </a:t>
             </a:r>
-            <a:fld id="{296237B6-5E3F-4A53-8617-0B6476DA17E1}" type="slidenum">
+            <a:fld id="{201E33D4-A69F-43E0-958C-51F3B5B92960}" type="slidenum">
               <a:rPr lang="en-US" sz="1350" dirty="0">
                 <a:solidFill>
                   <a:srgbClr val="969695"/>
@@ -2248,7 +2248,7 @@
               </a:rPr>
               <a:t>Marzo 2026 · </a:t>
             </a:r>
-            <a:fld id="{B8527E0D-ED06-472B-B01F-2E0BAEC098E6}" type="slidenum">
+            <a:fld id="{387E7632-27A4-47AC-BF97-389FCA0804B8}" type="slidenum">
               <a:rPr lang="en-US" sz="1350" dirty="0">
                 <a:solidFill>
                   <a:srgbClr val="969695"/>
@@ -2467,7 +2467,7 @@
               </a:rPr>
               <a:t>Marzo 2026 · </a:t>
             </a:r>
-            <a:fld id="{98A198A5-C19F-473F-9A80-43D657BB568F}" type="slidenum">
+            <a:fld id="{3D711F8A-CBC7-44F2-A0CF-4489B9088FB4}" type="slidenum">
               <a:rPr lang="en-US" sz="1350" dirty="0">
                 <a:solidFill>
                   <a:srgbClr val="969695"/>
@@ -2479,6 +2479,279 @@
               <a:t>2</a:t>
             </a:fld>
             <a:endParaRPr lang="en-US" sz="1350" dirty="0"/>
+          </a:p>
+        </p:txBody>
+      </p:sp>
+    </p:spTree>
+  </p:cSld>
+  <p:clrMapOvr>
+    <a:masterClrMapping/>
+  </p:clrMapOvr>
+</p:sldLayout>
+</file>
+
+<file path=ppt/slideLayouts/slideLayout6.xml><?xml version="1.0" encoding="utf-8"?>
+<p:sldLayout xmlns:a="http://schemas.openxmlformats.org/drawingml/2006/main" xmlns:r="http://schemas.openxmlformats.org/officeDocument/2006/relationships" xmlns:p="http://schemas.openxmlformats.org/presentationml/2006/main" preserve="1" type="secHead">
+  <p:cSld name="CMF Separador">
+    <p:spTree>
+      <p:nvGrpSpPr>
+        <p:cNvPr id="1" name=""/>
+        <p:cNvGrpSpPr/>
+        <p:nvPr/>
+      </p:nvGrpSpPr>
+      <p:grpSpPr/>
+      <p:sp>
+        <p:nvSpPr>
+          <p:cNvPr id="2" name="Fondo"/>
+          <p:cNvSpPr/>
+          <p:nvPr/>
+        </p:nvSpPr>
+        <p:spPr>
+          <a:xfrm>
+            <a:off x="0" y="0"/>
+            <a:ext cx="18288000" cy="10287000"/>
+          </a:xfrm>
+          <a:prstGeom prst="rect">
+            <a:avLst/>
+          </a:prstGeom>
+          <a:solidFill>
+            <a:srgbClr val="162C55"/>
+          </a:solidFill>
+          <a:ln>
+            <a:noFill/>
+          </a:ln>
+        </p:spPr>
+      </p:sp>
+      <p:sp>
+        <p:nvSpPr>
+          <p:cNvPr id="3" name="Numero"/>
+          <p:cNvSpPr/>
+          <p:nvPr>
+            <p:ph type="body" idx="4"/>
+          </p:nvPr>
+        </p:nvSpPr>
+        <p:spPr>
+          <a:xfrm>
+            <a:off x="12252960" y="960120"/>
+            <a:ext cx="4754880" cy="4754880"/>
+          </a:xfrm>
+          <a:prstGeom prst="rect">
+            <a:avLst/>
+          </a:prstGeom>
+          <a:noFill/>
+        </p:spPr>
+        <p:txBody>
+          <a:bodyPr wrap="square" lIns="0" tIns="0" rIns="0" bIns="0" anchor="t"/>
+          <a:lstStyle>
+            <a:lvl1pPr algn="r" marL="0" indent="0">
+              <a:buNone/>
+              <a:defRPr sz="21000" b="1">
+                <a:solidFill>
+                  <a:srgbClr val="3F3A7E"/>
+                </a:solidFill>
+                <a:latin typeface="Verdana"/>
+              </a:defRPr>
+            </a:lvl1pPr>
+          </a:lstStyle>
+          <a:p>
+            <a:pPr algn="r">
+              <a:buNone/>
+            </a:pPr>
+            <a:endParaRPr/>
+          </a:p>
+        </p:txBody>
+      </p:sp>
+      <p:sp>
+        <p:nvSpPr>
+          <p:cNvPr id="4" name="Antetitulo"/>
+          <p:cNvSpPr/>
+          <p:nvPr>
+            <p:ph type="body" idx="1"/>
+          </p:nvPr>
+        </p:nvSpPr>
+        <p:spPr>
+          <a:xfrm>
+            <a:off x="1280160" y="3794760"/>
+            <a:ext cx="10058400" cy="365760"/>
+          </a:xfrm>
+          <a:prstGeom prst="rect">
+            <a:avLst/>
+          </a:prstGeom>
+          <a:noFill/>
+        </p:spPr>
+        <p:txBody>
+          <a:bodyPr wrap="square" lIns="0" tIns="0" rIns="0" bIns="0" anchor="t"/>
+          <a:lstStyle>
+            <a:lvl1pPr algn="l" marL="0" indent="0">
+              <a:buNone/>
+              <a:defRPr sz="1575" b="1" cap="all">
+                <a:solidFill>
+                  <a:srgbClr val="97D6D2"/>
+                </a:solidFill>
+                <a:latin typeface="Source Sans 3"/>
+              </a:defRPr>
+            </a:lvl1pPr>
+          </a:lstStyle>
+          <a:p>
+            <a:pPr algn="l">
+              <a:buNone/>
+            </a:pPr>
+            <a:endParaRPr/>
+          </a:p>
+        </p:txBody>
+      </p:sp>
+      <p:sp>
+        <p:nvSpPr>
+          <p:cNvPr id="5" name="Regla"/>
+          <p:cNvSpPr/>
+          <p:nvPr/>
+        </p:nvSpPr>
+        <p:spPr>
+          <a:xfrm>
+            <a:off x="1280160" y="4453128"/>
+            <a:ext cx="1463040" cy="91440"/>
+          </a:xfrm>
+          <a:prstGeom prst="rect">
+            <a:avLst/>
+          </a:prstGeom>
+          <a:solidFill>
+            <a:srgbClr val="8547AD"/>
+          </a:solidFill>
+          <a:ln>
+            <a:noFill/>
+          </a:ln>
+        </p:spPr>
+      </p:sp>
+      <p:sp>
+        <p:nvSpPr>
+          <p:cNvPr id="6" name="Titulo"/>
+          <p:cNvSpPr/>
+          <p:nvPr>
+            <p:ph type="title"/>
+          </p:nvPr>
+        </p:nvSpPr>
+        <p:spPr>
+          <a:xfrm>
+            <a:off x="1280160" y="4846320"/>
+            <a:ext cx="10058400" cy="1554480"/>
+          </a:xfrm>
+          <a:prstGeom prst="rect">
+            <a:avLst/>
+          </a:prstGeom>
+          <a:noFill/>
+        </p:spPr>
+        <p:txBody>
+          <a:bodyPr wrap="square" lIns="0" tIns="0" rIns="0" bIns="0" anchor="t"/>
+          <a:lstStyle>
+            <a:lvl1pPr algn="l" marL="0" indent="0">
+              <a:buNone/>
+              <a:defRPr sz="5200" b="1">
+                <a:solidFill>
+                  <a:srgbClr val="FFFFFF"/>
+                </a:solidFill>
+                <a:latin typeface="Verdana"/>
+              </a:defRPr>
+            </a:lvl1pPr>
+          </a:lstStyle>
+          <a:p>
+            <a:pPr algn="l">
+              <a:buNone/>
+            </a:pPr>
+            <a:endParaRPr/>
+          </a:p>
+        </p:txBody>
+      </p:sp>
+      <p:sp>
+        <p:nvSpPr>
+          <p:cNvPr id="7" name="Bajada"/>
+          <p:cNvSpPr/>
+          <p:nvPr>
+            <p:ph type="body" idx="2"/>
+          </p:nvPr>
+        </p:nvSpPr>
+        <p:spPr>
+          <a:xfrm>
+            <a:off x="1280160" y="6812280"/>
+            <a:ext cx="9692640" cy="1188720"/>
+          </a:xfrm>
+          <a:prstGeom prst="rect">
+            <a:avLst/>
+          </a:prstGeom>
+          <a:noFill/>
+        </p:spPr>
+        <p:txBody>
+          <a:bodyPr wrap="square" lIns="0" tIns="0" rIns="0" bIns="0" anchor="t"/>
+          <a:lstStyle>
+            <a:lvl1pPr algn="l" marL="0" indent="0">
+              <a:buNone/>
+              <a:defRPr sz="1800">
+                <a:solidFill>
+                  <a:srgbClr val="97D6D2"/>
+                </a:solidFill>
+                <a:latin typeface="Source Sans 3"/>
+              </a:defRPr>
+            </a:lvl1pPr>
+          </a:lstStyle>
+          <a:p>
+            <a:pPr algn="l">
+              <a:buNone/>
+            </a:pPr>
+            <a:endParaRPr/>
+          </a:p>
+        </p:txBody>
+      </p:sp>
+      <p:pic>
+        <p:nvPicPr>
+          <p:cNvPr id="8" name="Logo"/>
+          <p:cNvPicPr/>
+          <p:nvPr/>
+        </p:nvPicPr>
+        <p:blipFill>
+          <a:blip r:embed="rIdLogo"/>
+          <a:stretch>
+            <a:fillRect/>
+          </a:stretch>
+        </p:blipFill>
+        <p:spPr>
+          <a:xfrm>
+            <a:off x="1280160" y="8549640"/>
+            <a:ext cx="2412336" cy="566928"/>
+          </a:xfrm>
+          <a:prstGeom prst="rect">
+            <a:avLst/>
+          </a:prstGeom>
+        </p:spPr>
+      </p:pic>
+      <p:sp>
+        <p:nvSpPr>
+          <p:cNvPr id="9" name="Folio"/>
+          <p:cNvSpPr txBox="1"/>
+          <p:nvPr/>
+        </p:nvSpPr>
+        <p:spPr>
+          <a:xfrm>
+            <a:off x="11887200" y="8796528"/>
+            <a:ext cx="5486400" cy="310896"/>
+          </a:xfrm>
+          <a:prstGeom prst="rect">
+            <a:avLst/>
+          </a:prstGeom>
+          <a:noFill/>
+        </p:spPr>
+        <p:txBody>
+          <a:bodyPr wrap="square" lIns="0" tIns="0" rIns="0" bIns="0"/>
+          <a:lstStyle/>
+          <a:p>
+            <a:pPr algn="r"/>
+            <a:fld id="{A629DC97-EA9D-4BD7-8512-A752779A19D7}" type="slidenum">
+              <a:rPr lang="es-CL" sz="1200">
+                <a:solidFill>
+                  <a:srgbClr val="D7D7D6"/>
+                </a:solidFill>
+                <a:latin typeface="Source Sans 3"/>
+              </a:rPr>
+              <a:t>2</a:t>
+            </a:fld>
           </a:p>
         </p:txBody>
       </p:sp>
@@ -2516,6 +2789,7 @@
     <p:sldLayoutId id="2147483653" r:id="rIdL3"/>
     <p:sldLayoutId id="2147483654" r:id="rIdL4"/>
     <p:sldLayoutId id="2147483655" r:id="rIdL5"/>
+    <p:sldLayoutId id="2147483656" r:id="rIdL6"/>
   </p:sldLayoutIdLst>
   <p:hf sldNum="0" hdr="0" ftr="0" dt="0"/>
   <p:txStyles>
